--- a/Day 1 files/Bayesian inference and computation using INLA and inlabru.pptx
+++ b/Day 1 files/Bayesian inference and computation using INLA and inlabru.pptx
@@ -51,8 +51,8 @@
     <p:sldId id="275" r:id="rId42"/>
     <p:sldId id="277" r:id="rId43"/>
     <p:sldId id="285" r:id="rId44"/>
-    <p:sldId id="267" r:id="rId45"/>
-    <p:sldId id="269" r:id="rId46"/>
+    <p:sldId id="269" r:id="rId45"/>
+    <p:sldId id="322" r:id="rId46"/>
     <p:sldId id="306" r:id="rId47"/>
     <p:sldId id="262" r:id="rId48"/>
     <p:sldId id="311" r:id="rId49"/>
@@ -171,7 +171,7 @@
 <file path=ppt/revisionInfo.xml><?xml version="1.0" encoding="utf-8"?>
 <p1510:revInfo xmlns:a="http://schemas.openxmlformats.org/drawingml/2006/main" xmlns:r="http://schemas.openxmlformats.org/officeDocument/2006/relationships" xmlns:p1510="http://schemas.microsoft.com/office/powerpoint/2015/10/main">
   <p1510:revLst>
-    <p1510:client id="{13CA5137-0D92-4A4A-B558-359371908FCD}" v="1670" dt="2026-10-08T11:54:14.667"/>
+    <p1510:client id="{13CA5137-0D92-4A4A-B558-359371908FCD}" v="46" dt="2026-10-11T22:39:54.292"/>
   </p1510:revLst>
 </p1510:revInfo>
 </file>
@@ -181,25 +181,10 @@
   <pc:docChgLst>
     <pc:chgData name="Edson Utazi" userId="bcb3a38a-3ad0-4389-89a4-f1f4b25807d3" providerId="ADAL" clId="{6E6BB287-36A5-4019-B86C-EECBD7B9E602}"/>
     <pc:docChg chg="undo custSel addSld delSld modSld sldOrd modMainMaster">
-      <pc:chgData name="Edson Utazi" userId="bcb3a38a-3ad0-4389-89a4-f1f4b25807d3" providerId="ADAL" clId="{6E6BB287-36A5-4019-B86C-EECBD7B9E602}" dt="2026-10-08T15:07:48.427" v="28901" actId="14100"/>
+      <pc:chgData name="Edson Utazi" userId="bcb3a38a-3ad0-4389-89a4-f1f4b25807d3" providerId="ADAL" clId="{6E6BB287-36A5-4019-B86C-EECBD7B9E602}" dt="2026-10-11T22:40:45.420" v="29195" actId="1076"/>
       <pc:docMkLst>
         <pc:docMk/>
       </pc:docMkLst>
-      <pc:sldChg chg="modSp del mod">
-        <pc:chgData name="Edson Utazi" userId="bcb3a38a-3ad0-4389-89a4-f1f4b25807d3" providerId="ADAL" clId="{6E6BB287-36A5-4019-B86C-EECBD7B9E602}" dt="2026-10-07T21:00:29.848" v="27347" actId="2696"/>
-        <pc:sldMkLst>
-          <pc:docMk/>
-          <pc:sldMk cId="3752196614" sldId="256"/>
-        </pc:sldMkLst>
-        <pc:spChg chg="mod">
-          <ac:chgData name="Edson Utazi" userId="bcb3a38a-3ad0-4389-89a4-f1f4b25807d3" providerId="ADAL" clId="{6E6BB287-36A5-4019-B86C-EECBD7B9E602}" dt="2026-10-07T20:37:54.867" v="27137" actId="20577"/>
-          <ac:spMkLst>
-            <pc:docMk/>
-            <pc:sldMk cId="3752196614" sldId="256"/>
-            <ac:spMk id="2" creationId="{E5397857-3E84-A3D6-DE03-96AAE388A33F}"/>
-          </ac:spMkLst>
-        </pc:spChg>
-      </pc:sldChg>
       <pc:sldChg chg="modSp mod">
         <pc:chgData name="Edson Utazi" userId="bcb3a38a-3ad0-4389-89a4-f1f4b25807d3" providerId="ADAL" clId="{6E6BB287-36A5-4019-B86C-EECBD7B9E602}" dt="2026-10-07T21:32:46.917" v="27822" actId="1076"/>
         <pc:sldMkLst>
@@ -229,14 +214,6 @@
           <pc:docMk/>
           <pc:sldMk cId="2627905391" sldId="258"/>
         </pc:sldMkLst>
-        <pc:spChg chg="del">
-          <ac:chgData name="Edson Utazi" userId="bcb3a38a-3ad0-4389-89a4-f1f4b25807d3" providerId="ADAL" clId="{6E6BB287-36A5-4019-B86C-EECBD7B9E602}" dt="2026-10-07T21:32:59.693" v="27823" actId="478"/>
-          <ac:spMkLst>
-            <pc:docMk/>
-            <pc:sldMk cId="2627905391" sldId="258"/>
-            <ac:spMk id="2" creationId="{EC378F18-4513-5454-D410-D341F54FF487}"/>
-          </ac:spMkLst>
-        </pc:spChg>
         <pc:spChg chg="mod">
           <ac:chgData name="Edson Utazi" userId="bcb3a38a-3ad0-4389-89a4-f1f4b25807d3" providerId="ADAL" clId="{6E6BB287-36A5-4019-B86C-EECBD7B9E602}" dt="2026-10-07T21:33:05.510" v="27825" actId="1076"/>
           <ac:spMkLst>
@@ -260,14 +237,6 @@
           <pc:docMk/>
           <pc:sldMk cId="3104454873" sldId="259"/>
         </pc:sldMkLst>
-        <pc:spChg chg="del">
-          <ac:chgData name="Edson Utazi" userId="bcb3a38a-3ad0-4389-89a4-f1f4b25807d3" providerId="ADAL" clId="{6E6BB287-36A5-4019-B86C-EECBD7B9E602}" dt="2026-10-07T21:33:11.418" v="27826" actId="478"/>
-          <ac:spMkLst>
-            <pc:docMk/>
-            <pc:sldMk cId="3104454873" sldId="259"/>
-            <ac:spMk id="2" creationId="{01F24367-DADA-8F4C-DBCE-406CD512796D}"/>
-          </ac:spMkLst>
-        </pc:spChg>
         <pc:spChg chg="mod">
           <ac:chgData name="Edson Utazi" userId="bcb3a38a-3ad0-4389-89a4-f1f4b25807d3" providerId="ADAL" clId="{6E6BB287-36A5-4019-B86C-EECBD7B9E602}" dt="2026-10-07T21:33:20.723" v="27829" actId="1076"/>
           <ac:spMkLst>
@@ -286,7 +255,7 @@
         </pc:spChg>
       </pc:sldChg>
       <pc:sldChg chg="addSp delSp modSp mod">
-        <pc:chgData name="Edson Utazi" userId="bcb3a38a-3ad0-4389-89a4-f1f4b25807d3" providerId="ADAL" clId="{6E6BB287-36A5-4019-B86C-EECBD7B9E602}" dt="2026-10-07T21:34:05.132" v="27845" actId="1076"/>
+        <pc:chgData name="Edson Utazi" userId="bcb3a38a-3ad0-4389-89a4-f1f4b25807d3" providerId="ADAL" clId="{6E6BB287-36A5-4019-B86C-EECBD7B9E602}" dt="2026-10-11T20:32:55.169" v="29052" actId="20577"/>
         <pc:sldMkLst>
           <pc:docMk/>
           <pc:sldMk cId="2586324638" sldId="260"/>
@@ -300,7 +269,7 @@
           </ac:spMkLst>
         </pc:spChg>
         <pc:spChg chg="mod">
-          <ac:chgData name="Edson Utazi" userId="bcb3a38a-3ad0-4389-89a4-f1f4b25807d3" providerId="ADAL" clId="{6E6BB287-36A5-4019-B86C-EECBD7B9E602}" dt="2026-09-18T15:54:16.994" v="8936" actId="20577"/>
+          <ac:chgData name="Edson Utazi" userId="bcb3a38a-3ad0-4389-89a4-f1f4b25807d3" providerId="ADAL" clId="{6E6BB287-36A5-4019-B86C-EECBD7B9E602}" dt="2026-10-11T20:32:55.169" v="29052" actId="20577"/>
           <ac:spMkLst>
             <pc:docMk/>
             <pc:sldMk cId="2586324638" sldId="260"/>
@@ -322,28 +291,12 @@
             <ac:spMk id="3" creationId="{DFD51760-A802-0822-0A8D-F09937C93216}"/>
           </ac:spMkLst>
         </pc:spChg>
-        <pc:spChg chg="add del mod">
-          <ac:chgData name="Edson Utazi" userId="bcb3a38a-3ad0-4389-89a4-f1f4b25807d3" providerId="ADAL" clId="{6E6BB287-36A5-4019-B86C-EECBD7B9E602}" dt="2026-10-07T21:34:18.266" v="27846" actId="478"/>
-          <ac:spMkLst>
-            <pc:docMk/>
-            <pc:sldMk cId="1231790654" sldId="261"/>
-            <ac:spMk id="4" creationId="{0B6B322D-CA4F-C9A8-C5BD-6457ECB64A55}"/>
-          </ac:spMkLst>
-        </pc:spChg>
         <pc:spChg chg="add mod">
           <ac:chgData name="Edson Utazi" userId="bcb3a38a-3ad0-4389-89a4-f1f4b25807d3" providerId="ADAL" clId="{6E6BB287-36A5-4019-B86C-EECBD7B9E602}" dt="2026-09-18T15:46:09.479" v="8887" actId="1036"/>
           <ac:spMkLst>
             <pc:docMk/>
             <pc:sldMk cId="1231790654" sldId="261"/>
             <ac:spMk id="7" creationId="{D82ACADC-0412-3C09-713B-607BA8B639B6}"/>
-          </ac:spMkLst>
-        </pc:spChg>
-        <pc:spChg chg="add del mod">
-          <ac:chgData name="Edson Utazi" userId="bcb3a38a-3ad0-4389-89a4-f1f4b25807d3" providerId="ADAL" clId="{6E6BB287-36A5-4019-B86C-EECBD7B9E602}" dt="2026-10-07T21:34:23.483" v="27847" actId="478"/>
-          <ac:spMkLst>
-            <pc:docMk/>
-            <pc:sldMk cId="1231790654" sldId="261"/>
-            <ac:spMk id="8" creationId="{96EB1E39-5A04-45AF-1DF7-133B5E45503D}"/>
           </ac:spMkLst>
         </pc:spChg>
         <pc:spChg chg="add mod">
@@ -408,22 +361,6 @@
             <ac:spMk id="3" creationId="{F94BE285-6373-37FC-0495-7ABEEBB3FAD3}"/>
           </ac:spMkLst>
         </pc:spChg>
-        <pc:spChg chg="add del mod">
-          <ac:chgData name="Edson Utazi" userId="bcb3a38a-3ad0-4389-89a4-f1f4b25807d3" providerId="ADAL" clId="{6E6BB287-36A5-4019-B86C-EECBD7B9E602}" dt="2026-10-07T21:34:42.604" v="27852" actId="478"/>
-          <ac:spMkLst>
-            <pc:docMk/>
-            <pc:sldMk cId="3459587962" sldId="264"/>
-            <ac:spMk id="4" creationId="{DC77A8ED-0E05-63E1-67ED-E2033914B80C}"/>
-          </ac:spMkLst>
-        </pc:spChg>
-        <pc:spChg chg="add del mod">
-          <ac:chgData name="Edson Utazi" userId="bcb3a38a-3ad0-4389-89a4-f1f4b25807d3" providerId="ADAL" clId="{6E6BB287-36A5-4019-B86C-EECBD7B9E602}" dt="2026-10-07T21:34:45.743" v="27853" actId="478"/>
-          <ac:spMkLst>
-            <pc:docMk/>
-            <pc:sldMk cId="3459587962" sldId="264"/>
-            <ac:spMk id="6" creationId="{DB1CB7CA-2ADC-1085-B19E-24CAF9CB793A}"/>
-          </ac:spMkLst>
-        </pc:spChg>
         <pc:spChg chg="add mod">
           <ac:chgData name="Edson Utazi" userId="bcb3a38a-3ad0-4389-89a4-f1f4b25807d3" providerId="ADAL" clId="{6E6BB287-36A5-4019-B86C-EECBD7B9E602}" dt="2026-10-07T21:34:47.351" v="27854"/>
           <ac:spMkLst>
@@ -447,22 +384,6 @@
             <ac:spMk id="3" creationId="{5FAC0161-65EC-A399-6072-184362059DB7}"/>
           </ac:spMkLst>
         </pc:spChg>
-        <pc:spChg chg="add del mod">
-          <ac:chgData name="Edson Utazi" userId="bcb3a38a-3ad0-4389-89a4-f1f4b25807d3" providerId="ADAL" clId="{6E6BB287-36A5-4019-B86C-EECBD7B9E602}" dt="2026-10-07T21:35:18.324" v="27863" actId="478"/>
-          <ac:spMkLst>
-            <pc:docMk/>
-            <pc:sldMk cId="2381632953" sldId="266"/>
-            <ac:spMk id="4" creationId="{CC190F28-2BF4-B377-43B8-FD4018CCB00C}"/>
-          </ac:spMkLst>
-        </pc:spChg>
-        <pc:spChg chg="add del mod">
-          <ac:chgData name="Edson Utazi" userId="bcb3a38a-3ad0-4389-89a4-f1f4b25807d3" providerId="ADAL" clId="{6E6BB287-36A5-4019-B86C-EECBD7B9E602}" dt="2026-10-07T21:35:20.830" v="27864" actId="478"/>
-          <ac:spMkLst>
-            <pc:docMk/>
-            <pc:sldMk cId="2381632953" sldId="266"/>
-            <ac:spMk id="6" creationId="{FF35ED7E-F7EB-8CC4-5084-4E4894F4B9E4}"/>
-          </ac:spMkLst>
-        </pc:spChg>
         <pc:spChg chg="add mod">
           <ac:chgData name="Edson Utazi" userId="bcb3a38a-3ad0-4389-89a4-f1f4b25807d3" providerId="ADAL" clId="{6E6BB287-36A5-4019-B86C-EECBD7B9E602}" dt="2026-10-07T21:35:21.512" v="27865"/>
           <ac:spMkLst>
@@ -472,28 +393,12 @@
           </ac:spMkLst>
         </pc:spChg>
       </pc:sldChg>
-      <pc:sldChg chg="modSp new mod ord">
-        <pc:chgData name="Edson Utazi" userId="bcb3a38a-3ad0-4389-89a4-f1f4b25807d3" providerId="ADAL" clId="{6E6BB287-36A5-4019-B86C-EECBD7B9E602}" dt="2026-10-07T21:37:33.911" v="27907" actId="207"/>
+      <pc:sldChg chg="modSp new del mod ord">
+        <pc:chgData name="Edson Utazi" userId="bcb3a38a-3ad0-4389-89a4-f1f4b25807d3" providerId="ADAL" clId="{6E6BB287-36A5-4019-B86C-EECBD7B9E602}" dt="2026-10-11T21:19:30.516" v="29054" actId="2696"/>
         <pc:sldMkLst>
           <pc:docMk/>
           <pc:sldMk cId="68859822" sldId="267"/>
         </pc:sldMkLst>
-        <pc:spChg chg="mod">
-          <ac:chgData name="Edson Utazi" userId="bcb3a38a-3ad0-4389-89a4-f1f4b25807d3" providerId="ADAL" clId="{6E6BB287-36A5-4019-B86C-EECBD7B9E602}" dt="2026-10-07T21:37:33.911" v="27907" actId="207"/>
-          <ac:spMkLst>
-            <pc:docMk/>
-            <pc:sldMk cId="68859822" sldId="267"/>
-            <ac:spMk id="2" creationId="{5360C929-FE1A-5EB6-9F47-277A941BED90}"/>
-          </ac:spMkLst>
-        </pc:spChg>
-        <pc:spChg chg="mod">
-          <ac:chgData name="Edson Utazi" userId="bcb3a38a-3ad0-4389-89a4-f1f4b25807d3" providerId="ADAL" clId="{6E6BB287-36A5-4019-B86C-EECBD7B9E602}" dt="2026-10-07T20:52:52.124" v="27337" actId="1076"/>
-          <ac:spMkLst>
-            <pc:docMk/>
-            <pc:sldMk cId="68859822" sldId="267"/>
-            <ac:spMk id="3" creationId="{53654091-AFB6-FC6D-8F0C-E15207010382}"/>
-          </ac:spMkLst>
-        </pc:spChg>
       </pc:sldChg>
       <pc:sldChg chg="addSp modSp new mod">
         <pc:chgData name="Edson Utazi" userId="bcb3a38a-3ad0-4389-89a4-f1f4b25807d3" providerId="ADAL" clId="{6E6BB287-36A5-4019-B86C-EECBD7B9E602}" dt="2026-10-07T21:35:53.859" v="27872" actId="1076"/>
@@ -538,14 +443,6 @@
             <pc:docMk/>
             <pc:sldMk cId="992726252" sldId="269"/>
             <ac:spMk id="2" creationId="{70B62F74-F2DF-7C6E-4D63-124DF11CCDE6}"/>
-          </ac:spMkLst>
-        </pc:spChg>
-        <pc:spChg chg="del mod">
-          <ac:chgData name="Edson Utazi" userId="bcb3a38a-3ad0-4389-89a4-f1f4b25807d3" providerId="ADAL" clId="{6E6BB287-36A5-4019-B86C-EECBD7B9E602}" dt="2026-10-07T20:47:22.608" v="27284" actId="478"/>
-          <ac:spMkLst>
-            <pc:docMk/>
-            <pc:sldMk cId="992726252" sldId="269"/>
-            <ac:spMk id="3" creationId="{1ECCFCF6-96CF-5848-F6F1-9CFD63A32EAE}"/>
           </ac:spMkLst>
         </pc:spChg>
         <pc:spChg chg="add mod">
@@ -613,13 +510,6 @@
           </ac:spMkLst>
         </pc:spChg>
       </pc:sldChg>
-      <pc:sldChg chg="modSp new del mod">
-        <pc:chgData name="Edson Utazi" userId="bcb3a38a-3ad0-4389-89a4-f1f4b25807d3" providerId="ADAL" clId="{6E6BB287-36A5-4019-B86C-EECBD7B9E602}" dt="2026-10-07T10:13:32.870" v="24010" actId="2696"/>
-        <pc:sldMkLst>
-          <pc:docMk/>
-          <pc:sldMk cId="3663702760" sldId="270"/>
-        </pc:sldMkLst>
-      </pc:sldChg>
       <pc:sldChg chg="addSp delSp modSp new mod">
         <pc:chgData name="Edson Utazi" userId="bcb3a38a-3ad0-4389-89a4-f1f4b25807d3" providerId="ADAL" clId="{6E6BB287-36A5-4019-B86C-EECBD7B9E602}" dt="2026-10-07T21:36:13.371" v="27876" actId="1076"/>
         <pc:sldMkLst>
@@ -634,28 +524,12 @@
             <ac:spMk id="3" creationId="{E59A500F-3854-8083-49DE-7F05A86DC05C}"/>
           </ac:spMkLst>
         </pc:spChg>
-        <pc:spChg chg="add del mod">
-          <ac:chgData name="Edson Utazi" userId="bcb3a38a-3ad0-4389-89a4-f1f4b25807d3" providerId="ADAL" clId="{6E6BB287-36A5-4019-B86C-EECBD7B9E602}" dt="2026-10-07T21:36:04.865" v="27873" actId="478"/>
-          <ac:spMkLst>
-            <pc:docMk/>
-            <pc:sldMk cId="1955224988" sldId="271"/>
-            <ac:spMk id="4" creationId="{DD3014C3-B298-B998-9519-8303732F7CF0}"/>
-          </ac:spMkLst>
-        </pc:spChg>
         <pc:spChg chg="add mod">
           <ac:chgData name="Edson Utazi" userId="bcb3a38a-3ad0-4389-89a4-f1f4b25807d3" providerId="ADAL" clId="{6E6BB287-36A5-4019-B86C-EECBD7B9E602}" dt="2026-09-17T18:34:19.994" v="6450" actId="113"/>
           <ac:spMkLst>
             <pc:docMk/>
             <pc:sldMk cId="1955224988" sldId="271"/>
             <ac:spMk id="5" creationId="{6EDA6022-7AA8-AF51-0932-74AD92373C2C}"/>
-          </ac:spMkLst>
-        </pc:spChg>
-        <pc:spChg chg="add del mod">
-          <ac:chgData name="Edson Utazi" userId="bcb3a38a-3ad0-4389-89a4-f1f4b25807d3" providerId="ADAL" clId="{6E6BB287-36A5-4019-B86C-EECBD7B9E602}" dt="2026-10-07T21:36:07.780" v="27874" actId="478"/>
-          <ac:spMkLst>
-            <pc:docMk/>
-            <pc:sldMk cId="1955224988" sldId="271"/>
-            <ac:spMk id="7" creationId="{1E0EA491-6FD8-4C07-BF11-76F3AEF9E8E5}"/>
           </ac:spMkLst>
         </pc:spChg>
         <pc:spChg chg="add mod">
@@ -668,25 +542,17 @@
         </pc:spChg>
       </pc:sldChg>
       <pc:sldChg chg="addSp delSp modSp new mod">
-        <pc:chgData name="Edson Utazi" userId="bcb3a38a-3ad0-4389-89a4-f1f4b25807d3" providerId="ADAL" clId="{6E6BB287-36A5-4019-B86C-EECBD7B9E602}" dt="2026-10-07T21:36:39.831" v="27891" actId="20577"/>
+        <pc:chgData name="Edson Utazi" userId="bcb3a38a-3ad0-4389-89a4-f1f4b25807d3" providerId="ADAL" clId="{6E6BB287-36A5-4019-B86C-EECBD7B9E602}" dt="2026-10-11T22:26:39.167" v="29157" actId="1076"/>
         <pc:sldMkLst>
           <pc:docMk/>
           <pc:sldMk cId="2930974717" sldId="273"/>
         </pc:sldMkLst>
         <pc:spChg chg="mod">
-          <ac:chgData name="Edson Utazi" userId="bcb3a38a-3ad0-4389-89a4-f1f4b25807d3" providerId="ADAL" clId="{6E6BB287-36A5-4019-B86C-EECBD7B9E602}" dt="2026-09-22T17:42:20.900" v="21089" actId="20577"/>
+          <ac:chgData name="Edson Utazi" userId="bcb3a38a-3ad0-4389-89a4-f1f4b25807d3" providerId="ADAL" clId="{6E6BB287-36A5-4019-B86C-EECBD7B9E602}" dt="2026-10-11T22:18:11.795" v="29083" actId="207"/>
           <ac:spMkLst>
             <pc:docMk/>
             <pc:sldMk cId="2930974717" sldId="273"/>
             <ac:spMk id="3" creationId="{63457CF2-8326-9C82-0FA9-D04EFB748042}"/>
-          </ac:spMkLst>
-        </pc:spChg>
-        <pc:spChg chg="add del mod">
-          <ac:chgData name="Edson Utazi" userId="bcb3a38a-3ad0-4389-89a4-f1f4b25807d3" providerId="ADAL" clId="{6E6BB287-36A5-4019-B86C-EECBD7B9E602}" dt="2026-10-07T21:36:29.667" v="27880" actId="478"/>
-          <ac:spMkLst>
-            <pc:docMk/>
-            <pc:sldMk cId="2930974717" sldId="273"/>
-            <ac:spMk id="4" creationId="{C44720B1-D1E7-49AE-9E33-3C8771EAA46A}"/>
           </ac:spMkLst>
         </pc:spChg>
         <pc:spChg chg="add mod">
@@ -697,20 +563,12 @@
             <ac:spMk id="5" creationId="{B9D51DB6-DEA4-53E5-4DD1-7EDEC377A95B}"/>
           </ac:spMkLst>
         </pc:spChg>
-        <pc:spChg chg="add mod">
-          <ac:chgData name="Edson Utazi" userId="bcb3a38a-3ad0-4389-89a4-f1f4b25807d3" providerId="ADAL" clId="{6E6BB287-36A5-4019-B86C-EECBD7B9E602}" dt="2026-09-18T08:55:00.303" v="7361" actId="20577"/>
+        <pc:spChg chg="add del mod">
+          <ac:chgData name="Edson Utazi" userId="bcb3a38a-3ad0-4389-89a4-f1f4b25807d3" providerId="ADAL" clId="{6E6BB287-36A5-4019-B86C-EECBD7B9E602}" dt="2026-10-11T21:00:55.926" v="29053" actId="478"/>
           <ac:spMkLst>
             <pc:docMk/>
             <pc:sldMk cId="2930974717" sldId="273"/>
             <ac:spMk id="6" creationId="{300DB3D0-4F69-6C1F-4B29-CAD6B7C036AF}"/>
-          </ac:spMkLst>
-        </pc:spChg>
-        <pc:spChg chg="add del mod">
-          <ac:chgData name="Edson Utazi" userId="bcb3a38a-3ad0-4389-89a4-f1f4b25807d3" providerId="ADAL" clId="{6E6BB287-36A5-4019-B86C-EECBD7B9E602}" dt="2026-10-07T21:36:32.445" v="27881" actId="478"/>
-          <ac:spMkLst>
-            <pc:docMk/>
-            <pc:sldMk cId="2930974717" sldId="273"/>
-            <ac:spMk id="8" creationId="{DCF9D511-1024-CFB0-30EE-031DDCD191D3}"/>
           </ac:spMkLst>
         </pc:spChg>
         <pc:spChg chg="add mod">
@@ -721,27 +579,43 @@
             <ac:spMk id="9" creationId="{A5F50DC8-C23E-44AB-51BC-12A6650A9BB5}"/>
           </ac:spMkLst>
         </pc:spChg>
+        <pc:spChg chg="add mod">
+          <ac:chgData name="Edson Utazi" userId="bcb3a38a-3ad0-4389-89a4-f1f4b25807d3" providerId="ADAL" clId="{6E6BB287-36A5-4019-B86C-EECBD7B9E602}" dt="2026-10-11T22:26:39.167" v="29157" actId="1076"/>
+          <ac:spMkLst>
+            <pc:docMk/>
+            <pc:sldMk cId="2930974717" sldId="273"/>
+            <ac:spMk id="11" creationId="{9BCAD435-21B7-F56F-A1E6-4411C127410F}"/>
+          </ac:spMkLst>
+        </pc:spChg>
+        <pc:cxnChg chg="add">
+          <ac:chgData name="Edson Utazi" userId="bcb3a38a-3ad0-4389-89a4-f1f4b25807d3" providerId="ADAL" clId="{6E6BB287-36A5-4019-B86C-EECBD7B9E602}" dt="2026-10-11T22:25:57.821" v="29126" actId="11529"/>
+          <ac:cxnSpMkLst>
+            <pc:docMk/>
+            <pc:sldMk cId="2930974717" sldId="273"/>
+            <ac:cxnSpMk id="7" creationId="{D4B3499D-F800-F396-9EFC-EB6BD63A8447}"/>
+          </ac:cxnSpMkLst>
+        </pc:cxnChg>
+        <pc:cxnChg chg="add mod">
+          <ac:chgData name="Edson Utazi" userId="bcb3a38a-3ad0-4389-89a4-f1f4b25807d3" providerId="ADAL" clId="{6E6BB287-36A5-4019-B86C-EECBD7B9E602}" dt="2026-10-11T22:26:10.363" v="29129" actId="14100"/>
+          <ac:cxnSpMkLst>
+            <pc:docMk/>
+            <pc:sldMk cId="2930974717" sldId="273"/>
+            <ac:cxnSpMk id="8" creationId="{E101BCBB-C962-90EF-B147-23DCD566E8A0}"/>
+          </ac:cxnSpMkLst>
+        </pc:cxnChg>
       </pc:sldChg>
       <pc:sldChg chg="addSp delSp modSp new mod">
-        <pc:chgData name="Edson Utazi" userId="bcb3a38a-3ad0-4389-89a4-f1f4b25807d3" providerId="ADAL" clId="{6E6BB287-36A5-4019-B86C-EECBD7B9E602}" dt="2026-10-07T21:36:23.357" v="27879"/>
+        <pc:chgData name="Edson Utazi" userId="bcb3a38a-3ad0-4389-89a4-f1f4b25807d3" providerId="ADAL" clId="{6E6BB287-36A5-4019-B86C-EECBD7B9E602}" dt="2026-10-11T22:24:52.134" v="29125" actId="14100"/>
         <pc:sldMkLst>
           <pc:docMk/>
           <pc:sldMk cId="1099569579" sldId="274"/>
         </pc:sldMkLst>
         <pc:spChg chg="mod">
-          <ac:chgData name="Edson Utazi" userId="bcb3a38a-3ad0-4389-89a4-f1f4b25807d3" providerId="ADAL" clId="{6E6BB287-36A5-4019-B86C-EECBD7B9E602}" dt="2026-09-17T18:55:38.673" v="6525" actId="113"/>
+          <ac:chgData name="Edson Utazi" userId="bcb3a38a-3ad0-4389-89a4-f1f4b25807d3" providerId="ADAL" clId="{6E6BB287-36A5-4019-B86C-EECBD7B9E602}" dt="2026-10-11T22:14:10.498" v="29080" actId="207"/>
           <ac:spMkLst>
             <pc:docMk/>
             <pc:sldMk cId="1099569579" sldId="274"/>
             <ac:spMk id="3" creationId="{E3DB4934-557B-230A-B95A-865C4A9A3B13}"/>
-          </ac:spMkLst>
-        </pc:spChg>
-        <pc:spChg chg="add del mod">
-          <ac:chgData name="Edson Utazi" userId="bcb3a38a-3ad0-4389-89a4-f1f4b25807d3" providerId="ADAL" clId="{6E6BB287-36A5-4019-B86C-EECBD7B9E602}" dt="2026-10-07T21:36:18.718" v="27877" actId="478"/>
-          <ac:spMkLst>
-            <pc:docMk/>
-            <pc:sldMk cId="1099569579" sldId="274"/>
-            <ac:spMk id="4" creationId="{853B9BCE-E401-28D3-B4D3-8C79BB023550}"/>
           </ac:spMkLst>
         </pc:spChg>
         <pc:spChg chg="add mod">
@@ -752,12 +626,12 @@
             <ac:spMk id="5" creationId="{67C63929-8DFA-DDFF-67E9-BFBCCB683C90}"/>
           </ac:spMkLst>
         </pc:spChg>
-        <pc:spChg chg="add del mod">
-          <ac:chgData name="Edson Utazi" userId="bcb3a38a-3ad0-4389-89a4-f1f4b25807d3" providerId="ADAL" clId="{6E6BB287-36A5-4019-B86C-EECBD7B9E602}" dt="2026-10-07T21:36:22.756" v="27878" actId="478"/>
+        <pc:spChg chg="add mod">
+          <ac:chgData name="Edson Utazi" userId="bcb3a38a-3ad0-4389-89a4-f1f4b25807d3" providerId="ADAL" clId="{6E6BB287-36A5-4019-B86C-EECBD7B9E602}" dt="2026-10-11T22:24:40.065" v="29124" actId="692"/>
           <ac:spMkLst>
             <pc:docMk/>
             <pc:sldMk cId="1099569579" sldId="274"/>
-            <ac:spMk id="7" creationId="{9E23A674-4D90-EF65-E259-CD59CC2A8D0E}"/>
+            <ac:spMk id="7" creationId="{4E504794-D02B-50C3-4914-DC4B172D9DAE}"/>
           </ac:spMkLst>
         </pc:spChg>
         <pc:spChg chg="add mod">
@@ -768,35 +642,27 @@
             <ac:spMk id="8" creationId="{10D68EA0-3A69-F1BD-64E0-291B9BF57133}"/>
           </ac:spMkLst>
         </pc:spChg>
+        <pc:cxnChg chg="add mod">
+          <ac:chgData name="Edson Utazi" userId="bcb3a38a-3ad0-4389-89a4-f1f4b25807d3" providerId="ADAL" clId="{6E6BB287-36A5-4019-B86C-EECBD7B9E602}" dt="2026-10-11T22:24:52.134" v="29125" actId="14100"/>
+          <ac:cxnSpMkLst>
+            <pc:docMk/>
+            <pc:sldMk cId="1099569579" sldId="274"/>
+            <ac:cxnSpMk id="6" creationId="{9BB7C94F-8757-79BD-F9E7-E79EAD21A22E}"/>
+          </ac:cxnSpMkLst>
+        </pc:cxnChg>
       </pc:sldChg>
       <pc:sldChg chg="addSp delSp modSp new mod modNotesTx">
-        <pc:chgData name="Edson Utazi" userId="bcb3a38a-3ad0-4389-89a4-f1f4b25807d3" providerId="ADAL" clId="{6E6BB287-36A5-4019-B86C-EECBD7B9E602}" dt="2026-10-07T21:36:49.798" v="27894"/>
+        <pc:chgData name="Edson Utazi" userId="bcb3a38a-3ad0-4389-89a4-f1f4b25807d3" providerId="ADAL" clId="{6E6BB287-36A5-4019-B86C-EECBD7B9E602}" dt="2026-10-11T22:39:54.292" v="29194" actId="113"/>
         <pc:sldMkLst>
           <pc:docMk/>
           <pc:sldMk cId="1829817678" sldId="275"/>
         </pc:sldMkLst>
         <pc:spChg chg="mod">
-          <ac:chgData name="Edson Utazi" userId="bcb3a38a-3ad0-4389-89a4-f1f4b25807d3" providerId="ADAL" clId="{6E6BB287-36A5-4019-B86C-EECBD7B9E602}" dt="2026-09-22T18:10:33.062" v="21491" actId="20577"/>
+          <ac:chgData name="Edson Utazi" userId="bcb3a38a-3ad0-4389-89a4-f1f4b25807d3" providerId="ADAL" clId="{6E6BB287-36A5-4019-B86C-EECBD7B9E602}" dt="2026-10-11T22:39:54.292" v="29194" actId="113"/>
           <ac:spMkLst>
             <pc:docMk/>
             <pc:sldMk cId="1829817678" sldId="275"/>
             <ac:spMk id="3" creationId="{24425193-3445-76B6-BB90-4B70A46F1B24}"/>
-          </ac:spMkLst>
-        </pc:spChg>
-        <pc:spChg chg="add del mod">
-          <ac:chgData name="Edson Utazi" userId="bcb3a38a-3ad0-4389-89a4-f1f4b25807d3" providerId="ADAL" clId="{6E6BB287-36A5-4019-B86C-EECBD7B9E602}" dt="2026-10-07T21:36:46.282" v="27892" actId="478"/>
-          <ac:spMkLst>
-            <pc:docMk/>
-            <pc:sldMk cId="1829817678" sldId="275"/>
-            <ac:spMk id="4" creationId="{E69FC06B-2CD0-795C-BA52-565EBD1B5026}"/>
-          </ac:spMkLst>
-        </pc:spChg>
-        <pc:spChg chg="add del mod">
-          <ac:chgData name="Edson Utazi" userId="bcb3a38a-3ad0-4389-89a4-f1f4b25807d3" providerId="ADAL" clId="{6E6BB287-36A5-4019-B86C-EECBD7B9E602}" dt="2026-10-07T21:36:48.374" v="27893" actId="478"/>
-          <ac:spMkLst>
-            <pc:docMk/>
-            <pc:sldMk cId="1829817678" sldId="275"/>
-            <ac:spMk id="6" creationId="{F3336D76-187A-98D5-E264-5B12128B2E7F}"/>
           </ac:spMkLst>
         </pc:spChg>
         <pc:spChg chg="add mod">
@@ -822,22 +688,6 @@
             <ac:spMk id="3" creationId="{4C430CD5-9E62-94E1-86DD-63CF88621161}"/>
           </ac:spMkLst>
         </pc:spChg>
-        <pc:spChg chg="add del mod">
-          <ac:chgData name="Edson Utazi" userId="bcb3a38a-3ad0-4389-89a4-f1f4b25807d3" providerId="ADAL" clId="{6E6BB287-36A5-4019-B86C-EECBD7B9E602}" dt="2026-10-07T21:36:55.302" v="27895" actId="478"/>
-          <ac:spMkLst>
-            <pc:docMk/>
-            <pc:sldMk cId="3413430994" sldId="277"/>
-            <ac:spMk id="4" creationId="{DEAFD774-8979-C47E-DD0A-948B355F737D}"/>
-          </ac:spMkLst>
-        </pc:spChg>
-        <pc:spChg chg="add del mod">
-          <ac:chgData name="Edson Utazi" userId="bcb3a38a-3ad0-4389-89a4-f1f4b25807d3" providerId="ADAL" clId="{6E6BB287-36A5-4019-B86C-EECBD7B9E602}" dt="2026-10-07T21:36:56.883" v="27896" actId="478"/>
-          <ac:spMkLst>
-            <pc:docMk/>
-            <pc:sldMk cId="3413430994" sldId="277"/>
-            <ac:spMk id="6" creationId="{EA1513CF-080D-9E48-2DCB-1D6F2FEBCEA5}"/>
-          </ac:spMkLst>
-        </pc:spChg>
         <pc:spChg chg="add mod">
           <ac:chgData name="Edson Utazi" userId="bcb3a38a-3ad0-4389-89a4-f1f4b25807d3" providerId="ADAL" clId="{6E6BB287-36A5-4019-B86C-EECBD7B9E602}" dt="2026-10-07T21:36:58.217" v="27897"/>
           <ac:spMkLst>
@@ -853,28 +703,12 @@
           <pc:docMk/>
           <pc:sldMk cId="2611253256" sldId="278"/>
         </pc:sldMkLst>
-        <pc:spChg chg="del mod">
-          <ac:chgData name="Edson Utazi" userId="bcb3a38a-3ad0-4389-89a4-f1f4b25807d3" providerId="ADAL" clId="{6E6BB287-36A5-4019-B86C-EECBD7B9E602}" dt="2026-10-07T21:12:58.869" v="27602" actId="478"/>
-          <ac:spMkLst>
-            <pc:docMk/>
-            <pc:sldMk cId="2611253256" sldId="278"/>
-            <ac:spMk id="2" creationId="{86ADAA6F-164F-9163-7D58-55B30F1C7A4E}"/>
-          </ac:spMkLst>
-        </pc:spChg>
         <pc:spChg chg="mod">
           <ac:chgData name="Edson Utazi" userId="bcb3a38a-3ad0-4389-89a4-f1f4b25807d3" providerId="ADAL" clId="{6E6BB287-36A5-4019-B86C-EECBD7B9E602}" dt="2026-10-07T10:04:02.393" v="23781" actId="113"/>
           <ac:spMkLst>
             <pc:docMk/>
             <pc:sldMk cId="2611253256" sldId="278"/>
             <ac:spMk id="3" creationId="{0A62F55B-2125-4227-6C84-656AEEEA9D97}"/>
-          </ac:spMkLst>
-        </pc:spChg>
-        <pc:spChg chg="add del mod">
-          <ac:chgData name="Edson Utazi" userId="bcb3a38a-3ad0-4389-89a4-f1f4b25807d3" providerId="ADAL" clId="{6E6BB287-36A5-4019-B86C-EECBD7B9E602}" dt="2026-10-07T21:13:00.529" v="27603" actId="478"/>
-          <ac:spMkLst>
-            <pc:docMk/>
-            <pc:sldMk cId="2611253256" sldId="278"/>
-            <ac:spMk id="5" creationId="{C992BAA5-A3FB-52E2-2D12-F5D6FE4872E3}"/>
           </ac:spMkLst>
         </pc:spChg>
         <pc:spChg chg="add mod">
@@ -924,14 +758,6 @@
             <ac:picMk id="5" creationId="{00710A87-D982-B336-13BB-55574B68EACB}"/>
           </ac:picMkLst>
         </pc:picChg>
-        <pc:picChg chg="add del mod">
-          <ac:chgData name="Edson Utazi" userId="bcb3a38a-3ad0-4389-89a4-f1f4b25807d3" providerId="ADAL" clId="{6E6BB287-36A5-4019-B86C-EECBD7B9E602}" dt="2026-10-07T08:55:17.867" v="22396" actId="478"/>
-          <ac:picMkLst>
-            <pc:docMk/>
-            <pc:sldMk cId="425356146" sldId="279"/>
-            <ac:picMk id="6" creationId="{CA1CB0FB-0A0E-2385-338F-233DABF4B758}"/>
-          </ac:picMkLst>
-        </pc:picChg>
       </pc:sldChg>
       <pc:sldChg chg="addSp delSp modSp new mod">
         <pc:chgData name="Edson Utazi" userId="bcb3a38a-3ad0-4389-89a4-f1f4b25807d3" providerId="ADAL" clId="{6E6BB287-36A5-4019-B86C-EECBD7B9E602}" dt="2026-10-07T21:16:15.195" v="27639" actId="1076"/>
@@ -945,22 +771,6 @@
             <pc:docMk/>
             <pc:sldMk cId="2357298708" sldId="280"/>
             <ac:spMk id="3" creationId="{50DCCB7F-9A87-F68E-6852-46D237456EF6}"/>
-          </ac:spMkLst>
-        </pc:spChg>
-        <pc:spChg chg="add del mod">
-          <ac:chgData name="Edson Utazi" userId="bcb3a38a-3ad0-4389-89a4-f1f4b25807d3" providerId="ADAL" clId="{6E6BB287-36A5-4019-B86C-EECBD7B9E602}" dt="2026-10-07T21:14:21.102" v="27617" actId="478"/>
-          <ac:spMkLst>
-            <pc:docMk/>
-            <pc:sldMk cId="2357298708" sldId="280"/>
-            <ac:spMk id="4" creationId="{9D17163D-9C4D-B49A-972C-DBBE2614C25B}"/>
-          </ac:spMkLst>
-        </pc:spChg>
-        <pc:spChg chg="add del mod">
-          <ac:chgData name="Edson Utazi" userId="bcb3a38a-3ad0-4389-89a4-f1f4b25807d3" providerId="ADAL" clId="{6E6BB287-36A5-4019-B86C-EECBD7B9E602}" dt="2026-10-07T21:14:23.017" v="27618" actId="478"/>
-          <ac:spMkLst>
-            <pc:docMk/>
-            <pc:sldMk cId="2357298708" sldId="280"/>
-            <ac:spMk id="5" creationId="{A434AA43-B1B8-CC8F-945B-513C25F62FF0}"/>
           </ac:spMkLst>
         </pc:spChg>
         <pc:spChg chg="add mod">
@@ -984,22 +794,6 @@
             <pc:docMk/>
             <pc:sldMk cId="965456773" sldId="281"/>
             <ac:spMk id="3" creationId="{83C96C03-B26A-AC84-F521-F1DE13220A07}"/>
-          </ac:spMkLst>
-        </pc:spChg>
-        <pc:spChg chg="add del mod">
-          <ac:chgData name="Edson Utazi" userId="bcb3a38a-3ad0-4389-89a4-f1f4b25807d3" providerId="ADAL" clId="{6E6BB287-36A5-4019-B86C-EECBD7B9E602}" dt="2026-10-07T21:14:32.992" v="27620" actId="478"/>
-          <ac:spMkLst>
-            <pc:docMk/>
-            <pc:sldMk cId="965456773" sldId="281"/>
-            <ac:spMk id="4" creationId="{070CB033-ADB7-373C-D228-C3F17376ABF3}"/>
-          </ac:spMkLst>
-        </pc:spChg>
-        <pc:spChg chg="add del mod">
-          <ac:chgData name="Edson Utazi" userId="bcb3a38a-3ad0-4389-89a4-f1f4b25807d3" providerId="ADAL" clId="{6E6BB287-36A5-4019-B86C-EECBD7B9E602}" dt="2026-10-07T21:14:36.018" v="27621" actId="478"/>
-          <ac:spMkLst>
-            <pc:docMk/>
-            <pc:sldMk cId="965456773" sldId="281"/>
-            <ac:spMk id="5" creationId="{DAFB0725-A407-50FF-1534-3B28C45AE519}"/>
           </ac:spMkLst>
         </pc:spChg>
         <pc:spChg chg="add mod">
@@ -1060,7 +854,7 @@
         </pc:cxnChg>
       </pc:sldChg>
       <pc:sldChg chg="addSp delSp modSp new mod ord">
-        <pc:chgData name="Edson Utazi" userId="bcb3a38a-3ad0-4389-89a4-f1f4b25807d3" providerId="ADAL" clId="{6E6BB287-36A5-4019-B86C-EECBD7B9E602}" dt="2026-10-07T21:27:16.813" v="27752" actId="1037"/>
+        <pc:chgData name="Edson Utazi" userId="bcb3a38a-3ad0-4389-89a4-f1f4b25807d3" providerId="ADAL" clId="{6E6BB287-36A5-4019-B86C-EECBD7B9E602}" dt="2026-10-11T19:51:54.916" v="29048" actId="6549"/>
         <pc:sldMkLst>
           <pc:docMk/>
           <pc:sldMk cId="200878240" sldId="282"/>
@@ -1082,7 +876,7 @@
           </ac:spMkLst>
         </pc:spChg>
         <pc:spChg chg="add mod">
-          <ac:chgData name="Edson Utazi" userId="bcb3a38a-3ad0-4389-89a4-f1f4b25807d3" providerId="ADAL" clId="{6E6BB287-36A5-4019-B86C-EECBD7B9E602}" dt="2026-10-07T21:26:46.140" v="27745" actId="1076"/>
+          <ac:chgData name="Edson Utazi" userId="bcb3a38a-3ad0-4389-89a4-f1f4b25807d3" providerId="ADAL" clId="{6E6BB287-36A5-4019-B86C-EECBD7B9E602}" dt="2026-10-11T19:51:54.916" v="29048" actId="6549"/>
           <ac:spMkLst>
             <pc:docMk/>
             <pc:sldMk cId="200878240" sldId="282"/>
@@ -1090,7 +884,7 @@
           </ac:spMkLst>
         </pc:spChg>
         <pc:spChg chg="add mod">
-          <ac:chgData name="Edson Utazi" userId="bcb3a38a-3ad0-4389-89a4-f1f4b25807d3" providerId="ADAL" clId="{6E6BB287-36A5-4019-B86C-EECBD7B9E602}" dt="2026-10-07T21:26:46.140" v="27745" actId="1076"/>
+          <ac:chgData name="Edson Utazi" userId="bcb3a38a-3ad0-4389-89a4-f1f4b25807d3" providerId="ADAL" clId="{6E6BB287-36A5-4019-B86C-EECBD7B9E602}" dt="2026-10-11T15:39:00.050" v="28932" actId="1035"/>
           <ac:spMkLst>
             <pc:docMk/>
             <pc:sldMk cId="200878240" sldId="282"/>
@@ -1098,7 +892,7 @@
           </ac:spMkLst>
         </pc:spChg>
         <pc:spChg chg="add mod">
-          <ac:chgData name="Edson Utazi" userId="bcb3a38a-3ad0-4389-89a4-f1f4b25807d3" providerId="ADAL" clId="{6E6BB287-36A5-4019-B86C-EECBD7B9E602}" dt="2026-10-07T21:26:46.140" v="27745" actId="1076"/>
+          <ac:chgData name="Edson Utazi" userId="bcb3a38a-3ad0-4389-89a4-f1f4b25807d3" providerId="ADAL" clId="{6E6BB287-36A5-4019-B86C-EECBD7B9E602}" dt="2026-10-11T15:39:00.050" v="28932" actId="1035"/>
           <ac:spMkLst>
             <pc:docMk/>
             <pc:sldMk cId="200878240" sldId="282"/>
@@ -1106,7 +900,7 @@
           </ac:spMkLst>
         </pc:spChg>
         <pc:cxnChg chg="add mod">
-          <ac:chgData name="Edson Utazi" userId="bcb3a38a-3ad0-4389-89a4-f1f4b25807d3" providerId="ADAL" clId="{6E6BB287-36A5-4019-B86C-EECBD7B9E602}" dt="2026-10-07T21:26:46.140" v="27745" actId="1076"/>
+          <ac:chgData name="Edson Utazi" userId="bcb3a38a-3ad0-4389-89a4-f1f4b25807d3" providerId="ADAL" clId="{6E6BB287-36A5-4019-B86C-EECBD7B9E602}" dt="2026-10-11T15:39:00.050" v="28932" actId="1035"/>
           <ac:cxnSpMkLst>
             <pc:docMk/>
             <pc:sldMk cId="200878240" sldId="282"/>
@@ -1114,7 +908,7 @@
           </ac:cxnSpMkLst>
         </pc:cxnChg>
         <pc:cxnChg chg="add mod">
-          <ac:chgData name="Edson Utazi" userId="bcb3a38a-3ad0-4389-89a4-f1f4b25807d3" providerId="ADAL" clId="{6E6BB287-36A5-4019-B86C-EECBD7B9E602}" dt="2026-10-07T21:26:46.140" v="27745" actId="1076"/>
+          <ac:chgData name="Edson Utazi" userId="bcb3a38a-3ad0-4389-89a4-f1f4b25807d3" providerId="ADAL" clId="{6E6BB287-36A5-4019-B86C-EECBD7B9E602}" dt="2026-10-11T15:39:00.050" v="28932" actId="1035"/>
           <ac:cxnSpMkLst>
             <pc:docMk/>
             <pc:sldMk cId="200878240" sldId="282"/>
@@ -1123,7 +917,7 @@
         </pc:cxnChg>
       </pc:sldChg>
       <pc:sldChg chg="modSp new mod">
-        <pc:chgData name="Edson Utazi" userId="bcb3a38a-3ad0-4389-89a4-f1f4b25807d3" providerId="ADAL" clId="{6E6BB287-36A5-4019-B86C-EECBD7B9E602}" dt="2026-10-07T21:10:15.330" v="27573" actId="1076"/>
+        <pc:chgData name="Edson Utazi" userId="bcb3a38a-3ad0-4389-89a4-f1f4b25807d3" providerId="ADAL" clId="{6E6BB287-36A5-4019-B86C-EECBD7B9E602}" dt="2026-10-11T13:25:00.909" v="28902" actId="113"/>
         <pc:sldMkLst>
           <pc:docMk/>
           <pc:sldMk cId="4118702284" sldId="283"/>
@@ -1137,7 +931,7 @@
           </ac:spMkLst>
         </pc:spChg>
         <pc:spChg chg="mod">
-          <ac:chgData name="Edson Utazi" userId="bcb3a38a-3ad0-4389-89a4-f1f4b25807d3" providerId="ADAL" clId="{6E6BB287-36A5-4019-B86C-EECBD7B9E602}" dt="2026-10-07T21:10:15.330" v="27573" actId="1076"/>
+          <ac:chgData name="Edson Utazi" userId="bcb3a38a-3ad0-4389-89a4-f1f4b25807d3" providerId="ADAL" clId="{6E6BB287-36A5-4019-B86C-EECBD7B9E602}" dt="2026-10-11T13:25:00.909" v="28902" actId="113"/>
           <ac:spMkLst>
             <pc:docMk/>
             <pc:sldMk cId="4118702284" sldId="283"/>
@@ -1159,28 +953,12 @@
             <ac:spMk id="3" creationId="{447CCAA2-94C4-BB63-BBB2-27DB573882D6}"/>
           </ac:spMkLst>
         </pc:spChg>
-        <pc:spChg chg="add del mod">
-          <ac:chgData name="Edson Utazi" userId="bcb3a38a-3ad0-4389-89a4-f1f4b25807d3" providerId="ADAL" clId="{6E6BB287-36A5-4019-B86C-EECBD7B9E602}" dt="2026-10-07T21:34:31.604" v="27849" actId="478"/>
-          <ac:spMkLst>
-            <pc:docMk/>
-            <pc:sldMk cId="2612982830" sldId="284"/>
-            <ac:spMk id="4" creationId="{FCC97997-8C74-3E98-1564-456D85372974}"/>
-          </ac:spMkLst>
-        </pc:spChg>
         <pc:spChg chg="add mod">
           <ac:chgData name="Edson Utazi" userId="bcb3a38a-3ad0-4389-89a4-f1f4b25807d3" providerId="ADAL" clId="{6E6BB287-36A5-4019-B86C-EECBD7B9E602}" dt="2026-09-18T15:55:05.520" v="8941" actId="1076"/>
           <ac:spMkLst>
             <pc:docMk/>
             <pc:sldMk cId="2612982830" sldId="284"/>
             <ac:spMk id="6" creationId="{AC432AA8-8A69-939B-C277-5E4EA64A0399}"/>
-          </ac:spMkLst>
-        </pc:spChg>
-        <pc:spChg chg="add del mod">
-          <ac:chgData name="Edson Utazi" userId="bcb3a38a-3ad0-4389-89a4-f1f4b25807d3" providerId="ADAL" clId="{6E6BB287-36A5-4019-B86C-EECBD7B9E602}" dt="2026-10-07T21:34:33.834" v="27850" actId="478"/>
-          <ac:spMkLst>
-            <pc:docMk/>
-            <pc:sldMk cId="2612982830" sldId="284"/>
-            <ac:spMk id="8" creationId="{AD38F564-9082-E287-DB89-617AD249217F}"/>
           </ac:spMkLst>
         </pc:spChg>
         <pc:spChg chg="add mod">
@@ -1201,33 +979,17 @@
         </pc:cxnChg>
       </pc:sldChg>
       <pc:sldChg chg="addSp delSp modSp new mod">
-        <pc:chgData name="Edson Utazi" userId="bcb3a38a-3ad0-4389-89a4-f1f4b25807d3" providerId="ADAL" clId="{6E6BB287-36A5-4019-B86C-EECBD7B9E602}" dt="2026-10-07T21:37:07.970" v="27900"/>
+        <pc:chgData name="Edson Utazi" userId="bcb3a38a-3ad0-4389-89a4-f1f4b25807d3" providerId="ADAL" clId="{6E6BB287-36A5-4019-B86C-EECBD7B9E602}" dt="2026-10-11T22:40:45.420" v="29195" actId="1076"/>
         <pc:sldMkLst>
           <pc:docMk/>
           <pc:sldMk cId="1782349157" sldId="285"/>
         </pc:sldMkLst>
         <pc:spChg chg="mod">
-          <ac:chgData name="Edson Utazi" userId="bcb3a38a-3ad0-4389-89a4-f1f4b25807d3" providerId="ADAL" clId="{6E6BB287-36A5-4019-B86C-EECBD7B9E602}" dt="2026-09-18T22:45:52.643" v="9816" actId="1076"/>
+          <ac:chgData name="Edson Utazi" userId="bcb3a38a-3ad0-4389-89a4-f1f4b25807d3" providerId="ADAL" clId="{6E6BB287-36A5-4019-B86C-EECBD7B9E602}" dt="2026-10-11T22:40:45.420" v="29195" actId="1076"/>
           <ac:spMkLst>
             <pc:docMk/>
             <pc:sldMk cId="1782349157" sldId="285"/>
             <ac:spMk id="3" creationId="{3E8D2B4D-F34B-D3D5-FB0E-B7905E0FE383}"/>
-          </ac:spMkLst>
-        </pc:spChg>
-        <pc:spChg chg="add del mod">
-          <ac:chgData name="Edson Utazi" userId="bcb3a38a-3ad0-4389-89a4-f1f4b25807d3" providerId="ADAL" clId="{6E6BB287-36A5-4019-B86C-EECBD7B9E602}" dt="2026-10-07T21:37:04.092" v="27898" actId="478"/>
-          <ac:spMkLst>
-            <pc:docMk/>
-            <pc:sldMk cId="1782349157" sldId="285"/>
-            <ac:spMk id="4" creationId="{CA6322B9-9760-44AB-5D48-4F8837AFB7C7}"/>
-          </ac:spMkLst>
-        </pc:spChg>
-        <pc:spChg chg="add del mod">
-          <ac:chgData name="Edson Utazi" userId="bcb3a38a-3ad0-4389-89a4-f1f4b25807d3" providerId="ADAL" clId="{6E6BB287-36A5-4019-B86C-EECBD7B9E602}" dt="2026-10-07T21:37:06.407" v="27899" actId="478"/>
-          <ac:spMkLst>
-            <pc:docMk/>
-            <pc:sldMk cId="1782349157" sldId="285"/>
-            <ac:spMk id="6" creationId="{79E7B7DC-43AC-ECB7-8CA9-70B9EAC6CEB3}"/>
           </ac:spMkLst>
         </pc:spChg>
         <pc:spChg chg="add mod">
@@ -1251,38 +1013,6 @@
             <pc:docMk/>
             <pc:sldMk cId="3402065144" sldId="286"/>
             <ac:spMk id="3" creationId="{19504E87-9DEF-4AEC-AEA3-362487AB730B}"/>
-          </ac:spMkLst>
-        </pc:spChg>
-        <pc:spChg chg="add del mod">
-          <ac:chgData name="Edson Utazi" userId="bcb3a38a-3ad0-4389-89a4-f1f4b25807d3" providerId="ADAL" clId="{6E6BB287-36A5-4019-B86C-EECBD7B9E602}" dt="2026-10-07T21:14:50.645" v="27623" actId="478"/>
-          <ac:spMkLst>
-            <pc:docMk/>
-            <pc:sldMk cId="3402065144" sldId="286"/>
-            <ac:spMk id="4" creationId="{E79614C5-D9C0-AF0A-1AD5-9C49ED441CA9}"/>
-          </ac:spMkLst>
-        </pc:spChg>
-        <pc:spChg chg="add del mod">
-          <ac:chgData name="Edson Utazi" userId="bcb3a38a-3ad0-4389-89a4-f1f4b25807d3" providerId="ADAL" clId="{6E6BB287-36A5-4019-B86C-EECBD7B9E602}" dt="2026-10-07T21:14:53.851" v="27624" actId="478"/>
-          <ac:spMkLst>
-            <pc:docMk/>
-            <pc:sldMk cId="3402065144" sldId="286"/>
-            <ac:spMk id="5" creationId="{C5CAAEC0-F14E-61FB-5261-DB0D9BDD38EF}"/>
-          </ac:spMkLst>
-        </pc:spChg>
-        <pc:spChg chg="add del mod">
-          <ac:chgData name="Edson Utazi" userId="bcb3a38a-3ad0-4389-89a4-f1f4b25807d3" providerId="ADAL" clId="{6E6BB287-36A5-4019-B86C-EECBD7B9E602}" dt="2026-10-07T21:18:12.093" v="27673" actId="478"/>
-          <ac:spMkLst>
-            <pc:docMk/>
-            <pc:sldMk cId="3402065144" sldId="286"/>
-            <ac:spMk id="6" creationId="{54CAF552-512B-FB82-0E23-2231301F478B}"/>
-          </ac:spMkLst>
-        </pc:spChg>
-        <pc:spChg chg="add del mod">
-          <ac:chgData name="Edson Utazi" userId="bcb3a38a-3ad0-4389-89a4-f1f4b25807d3" providerId="ADAL" clId="{6E6BB287-36A5-4019-B86C-EECBD7B9E602}" dt="2026-10-07T21:18:18.163" v="27675" actId="478"/>
-          <ac:spMkLst>
-            <pc:docMk/>
-            <pc:sldMk cId="3402065144" sldId="286"/>
-            <ac:spMk id="8" creationId="{6CDC7DC1-7E46-A031-1CA9-4A32C43D9781}"/>
           </ac:spMkLst>
         </pc:spChg>
         <pc:spChg chg="add mod">
@@ -1314,22 +1044,6 @@
             <pc:docMk/>
             <pc:sldMk cId="718436160" sldId="287"/>
             <ac:spMk id="4" creationId="{7ABDF0E7-3CBF-1DF8-2042-2A227D5AF6AD}"/>
-          </ac:spMkLst>
-        </pc:spChg>
-        <pc:spChg chg="add del mod">
-          <ac:chgData name="Edson Utazi" userId="bcb3a38a-3ad0-4389-89a4-f1f4b25807d3" providerId="ADAL" clId="{6E6BB287-36A5-4019-B86C-EECBD7B9E602}" dt="2026-10-07T21:18:53.925" v="27676" actId="478"/>
-          <ac:spMkLst>
-            <pc:docMk/>
-            <pc:sldMk cId="718436160" sldId="287"/>
-            <ac:spMk id="5" creationId="{EA138770-CBE4-C404-9431-B2D2D4A4DEA1}"/>
-          </ac:spMkLst>
-        </pc:spChg>
-        <pc:spChg chg="add del mod">
-          <ac:chgData name="Edson Utazi" userId="bcb3a38a-3ad0-4389-89a4-f1f4b25807d3" providerId="ADAL" clId="{6E6BB287-36A5-4019-B86C-EECBD7B9E602}" dt="2026-10-07T21:18:56.182" v="27677" actId="478"/>
-          <ac:spMkLst>
-            <pc:docMk/>
-            <pc:sldMk cId="718436160" sldId="287"/>
-            <ac:spMk id="6" creationId="{2031365F-73D3-A9DF-8A22-9F4E94F09E98}"/>
           </ac:spMkLst>
         </pc:spChg>
         <pc:spChg chg="add">
@@ -1381,33 +1095,17 @@
         </pc:cxnChg>
       </pc:sldChg>
       <pc:sldChg chg="addSp delSp modSp new mod">
-        <pc:chgData name="Edson Utazi" userId="bcb3a38a-3ad0-4389-89a4-f1f4b25807d3" providerId="ADAL" clId="{6E6BB287-36A5-4019-B86C-EECBD7B9E602}" dt="2026-10-07T21:31:53.460" v="27806" actId="1076"/>
+        <pc:chgData name="Edson Utazi" userId="bcb3a38a-3ad0-4389-89a4-f1f4b25807d3" providerId="ADAL" clId="{6E6BB287-36A5-4019-B86C-EECBD7B9E602}" dt="2026-10-11T17:56:57.816" v="29047" actId="1076"/>
         <pc:sldMkLst>
           <pc:docMk/>
           <pc:sldMk cId="3429462359" sldId="289"/>
         </pc:sldMkLst>
         <pc:spChg chg="mod">
-          <ac:chgData name="Edson Utazi" userId="bcb3a38a-3ad0-4389-89a4-f1f4b25807d3" providerId="ADAL" clId="{6E6BB287-36A5-4019-B86C-EECBD7B9E602}" dt="2026-10-07T21:31:53.460" v="27806" actId="1076"/>
+          <ac:chgData name="Edson Utazi" userId="bcb3a38a-3ad0-4389-89a4-f1f4b25807d3" providerId="ADAL" clId="{6E6BB287-36A5-4019-B86C-EECBD7B9E602}" dt="2026-10-11T17:56:57.816" v="29047" actId="1076"/>
           <ac:spMkLst>
             <pc:docMk/>
             <pc:sldMk cId="3429462359" sldId="289"/>
             <ac:spMk id="3" creationId="{4543467E-7841-2E32-8CC1-6F0FA8F5C682}"/>
-          </ac:spMkLst>
-        </pc:spChg>
-        <pc:spChg chg="add del mod">
-          <ac:chgData name="Edson Utazi" userId="bcb3a38a-3ad0-4389-89a4-f1f4b25807d3" providerId="ADAL" clId="{6E6BB287-36A5-4019-B86C-EECBD7B9E602}" dt="2026-10-07T21:31:45.791" v="27803" actId="478"/>
-          <ac:spMkLst>
-            <pc:docMk/>
-            <pc:sldMk cId="3429462359" sldId="289"/>
-            <ac:spMk id="4" creationId="{5328ADB4-D9A1-5D96-2311-664214C0A787}"/>
-          </ac:spMkLst>
-        </pc:spChg>
-        <pc:spChg chg="add del mod">
-          <ac:chgData name="Edson Utazi" userId="bcb3a38a-3ad0-4389-89a4-f1f4b25807d3" providerId="ADAL" clId="{6E6BB287-36A5-4019-B86C-EECBD7B9E602}" dt="2026-10-07T21:31:48.038" v="27804" actId="478"/>
-          <ac:spMkLst>
-            <pc:docMk/>
-            <pc:sldMk cId="3429462359" sldId="289"/>
-            <ac:spMk id="6" creationId="{919AE39D-F4D2-5910-BFCF-EB3CE98843B8}"/>
           </ac:spMkLst>
         </pc:spChg>
         <pc:spChg chg="add mod">
@@ -1456,36 +1154,12 @@
             <ac:spMk id="3" creationId="{E9725C01-4B77-4F38-F232-0CA1B6F1D23E}"/>
           </ac:spMkLst>
         </pc:spChg>
-        <pc:spChg chg="add del mod">
-          <ac:chgData name="Edson Utazi" userId="bcb3a38a-3ad0-4389-89a4-f1f4b25807d3" providerId="ADAL" clId="{6E6BB287-36A5-4019-B86C-EECBD7B9E602}" dt="2026-10-07T21:23:54.035" v="27710" actId="478"/>
-          <ac:spMkLst>
-            <pc:docMk/>
-            <pc:sldMk cId="2328245857" sldId="292"/>
-            <ac:spMk id="4" creationId="{EBBF921B-44BD-CB70-4EF2-FE24AABB6931}"/>
-          </ac:spMkLst>
-        </pc:spChg>
-        <pc:spChg chg="add del mod">
-          <ac:chgData name="Edson Utazi" userId="bcb3a38a-3ad0-4389-89a4-f1f4b25807d3" providerId="ADAL" clId="{6E6BB287-36A5-4019-B86C-EECBD7B9E602}" dt="2026-10-07T21:24:08.074" v="27715" actId="478"/>
-          <ac:spMkLst>
-            <pc:docMk/>
-            <pc:sldMk cId="2328245857" sldId="292"/>
-            <ac:spMk id="6" creationId="{932D8DB7-31A4-EEF6-6CE4-0273B7CBCE12}"/>
-          </ac:spMkLst>
-        </pc:spChg>
         <pc:spChg chg="add mod">
           <ac:chgData name="Edson Utazi" userId="bcb3a38a-3ad0-4389-89a4-f1f4b25807d3" providerId="ADAL" clId="{6E6BB287-36A5-4019-B86C-EECBD7B9E602}" dt="2026-10-07T21:23:54.707" v="27712" actId="27636"/>
           <ac:spMkLst>
             <pc:docMk/>
             <pc:sldMk cId="2328245857" sldId="292"/>
             <ac:spMk id="7" creationId="{A51A34A6-B762-8861-0450-EC946D05DBCF}"/>
-          </ac:spMkLst>
-        </pc:spChg>
-        <pc:spChg chg="add del mod">
-          <ac:chgData name="Edson Utazi" userId="bcb3a38a-3ad0-4389-89a4-f1f4b25807d3" providerId="ADAL" clId="{6E6BB287-36A5-4019-B86C-EECBD7B9E602}" dt="2026-10-07T21:24:03.876" v="27714" actId="478"/>
-          <ac:spMkLst>
-            <pc:docMk/>
-            <pc:sldMk cId="2328245857" sldId="292"/>
-            <ac:spMk id="9" creationId="{75C6AEA2-87D4-241F-E84E-C827D0E5084D}"/>
           </ac:spMkLst>
         </pc:spChg>
       </pc:sldChg>
@@ -1513,33 +1187,17 @@
         </pc:spChg>
       </pc:sldChg>
       <pc:sldChg chg="addSp delSp modSp new mod">
-        <pc:chgData name="Edson Utazi" userId="bcb3a38a-3ad0-4389-89a4-f1f4b25807d3" providerId="ADAL" clId="{6E6BB287-36A5-4019-B86C-EECBD7B9E602}" dt="2026-10-07T21:32:01.697" v="27809"/>
+        <pc:chgData name="Edson Utazi" userId="bcb3a38a-3ad0-4389-89a4-f1f4b25807d3" providerId="ADAL" clId="{6E6BB287-36A5-4019-B86C-EECBD7B9E602}" dt="2026-10-11T20:08:45.821" v="29049" actId="20577"/>
         <pc:sldMkLst>
           <pc:docMk/>
           <pc:sldMk cId="943605482" sldId="294"/>
         </pc:sldMkLst>
         <pc:spChg chg="mod">
-          <ac:chgData name="Edson Utazi" userId="bcb3a38a-3ad0-4389-89a4-f1f4b25807d3" providerId="ADAL" clId="{6E6BB287-36A5-4019-B86C-EECBD7B9E602}" dt="2026-09-20T17:41:22.028" v="15418" actId="207"/>
+          <ac:chgData name="Edson Utazi" userId="bcb3a38a-3ad0-4389-89a4-f1f4b25807d3" providerId="ADAL" clId="{6E6BB287-36A5-4019-B86C-EECBD7B9E602}" dt="2026-10-11T20:08:45.821" v="29049" actId="20577"/>
           <ac:spMkLst>
             <pc:docMk/>
             <pc:sldMk cId="943605482" sldId="294"/>
             <ac:spMk id="3" creationId="{FE6A98A4-DF32-9282-E2A2-2935C5310BE3}"/>
-          </ac:spMkLst>
-        </pc:spChg>
-        <pc:spChg chg="add del mod">
-          <ac:chgData name="Edson Utazi" userId="bcb3a38a-3ad0-4389-89a4-f1f4b25807d3" providerId="ADAL" clId="{6E6BB287-36A5-4019-B86C-EECBD7B9E602}" dt="2026-10-07T21:31:58.164" v="27807" actId="478"/>
-          <ac:spMkLst>
-            <pc:docMk/>
-            <pc:sldMk cId="943605482" sldId="294"/>
-            <ac:spMk id="4" creationId="{E3C062AA-DB6E-3B4B-D3AA-7407F9657E1E}"/>
-          </ac:spMkLst>
-        </pc:spChg>
-        <pc:spChg chg="add del mod">
-          <ac:chgData name="Edson Utazi" userId="bcb3a38a-3ad0-4389-89a4-f1f4b25807d3" providerId="ADAL" clId="{6E6BB287-36A5-4019-B86C-EECBD7B9E602}" dt="2026-10-07T21:32:00.435" v="27808" actId="478"/>
-          <ac:spMkLst>
-            <pc:docMk/>
-            <pc:sldMk cId="943605482" sldId="294"/>
-            <ac:spMk id="6" creationId="{72C1A93C-5954-6C1C-01B3-87D891315CF2}"/>
           </ac:spMkLst>
         </pc:spChg>
         <pc:spChg chg="add mod">
@@ -1557,14 +1215,6 @@
           <pc:docMk/>
           <pc:sldMk cId="118645407" sldId="295"/>
         </pc:sldMkLst>
-        <pc:spChg chg="del">
-          <ac:chgData name="Edson Utazi" userId="bcb3a38a-3ad0-4389-89a4-f1f4b25807d3" providerId="ADAL" clId="{6E6BB287-36A5-4019-B86C-EECBD7B9E602}" dt="2026-10-07T21:32:08.206" v="27810" actId="478"/>
-          <ac:spMkLst>
-            <pc:docMk/>
-            <pc:sldMk cId="118645407" sldId="295"/>
-            <ac:spMk id="2" creationId="{3502B190-6B74-6767-284E-38DD8DE4BA1F}"/>
-          </ac:spMkLst>
-        </pc:spChg>
         <pc:spChg chg="mod">
           <ac:chgData name="Edson Utazi" userId="bcb3a38a-3ad0-4389-89a4-f1f4b25807d3" providerId="ADAL" clId="{6E6BB287-36A5-4019-B86C-EECBD7B9E602}" dt="2026-10-07T21:32:19.460" v="27814" actId="20577"/>
           <ac:spMkLst>
@@ -1583,25 +1233,17 @@
         </pc:spChg>
       </pc:sldChg>
       <pc:sldChg chg="addSp delSp modSp new mod">
-        <pc:chgData name="Edson Utazi" userId="bcb3a38a-3ad0-4389-89a4-f1f4b25807d3" providerId="ADAL" clId="{6E6BB287-36A5-4019-B86C-EECBD7B9E602}" dt="2026-10-07T21:31:04.081" v="27787" actId="1076"/>
+        <pc:chgData name="Edson Utazi" userId="bcb3a38a-3ad0-4389-89a4-f1f4b25807d3" providerId="ADAL" clId="{6E6BB287-36A5-4019-B86C-EECBD7B9E602}" dt="2026-10-11T15:56:16.226" v="28972" actId="20577"/>
         <pc:sldMkLst>
           <pc:docMk/>
           <pc:sldMk cId="544240998" sldId="296"/>
         </pc:sldMkLst>
         <pc:spChg chg="mod">
-          <ac:chgData name="Edson Utazi" userId="bcb3a38a-3ad0-4389-89a4-f1f4b25807d3" providerId="ADAL" clId="{6E6BB287-36A5-4019-B86C-EECBD7B9E602}" dt="2026-10-07T21:30:59.427" v="27786" actId="1076"/>
+          <ac:chgData name="Edson Utazi" userId="bcb3a38a-3ad0-4389-89a4-f1f4b25807d3" providerId="ADAL" clId="{6E6BB287-36A5-4019-B86C-EECBD7B9E602}" dt="2026-10-11T15:56:16.226" v="28972" actId="20577"/>
           <ac:spMkLst>
             <pc:docMk/>
             <pc:sldMk cId="544240998" sldId="296"/>
             <ac:spMk id="3" creationId="{1591ED51-3632-E7C3-D235-2B499C7CC217}"/>
-          </ac:spMkLst>
-        </pc:spChg>
-        <pc:spChg chg="add del mod">
-          <ac:chgData name="Edson Utazi" userId="bcb3a38a-3ad0-4389-89a4-f1f4b25807d3" providerId="ADAL" clId="{6E6BB287-36A5-4019-B86C-EECBD7B9E602}" dt="2026-10-07T21:30:51.993" v="27783" actId="478"/>
-          <ac:spMkLst>
-            <pc:docMk/>
-            <pc:sldMk cId="544240998" sldId="296"/>
-            <ac:spMk id="4" creationId="{1D81E7A1-530D-8E31-8D69-6EE3C82DDA26}"/>
           </ac:spMkLst>
         </pc:spChg>
         <pc:spChg chg="add mod">
@@ -1610,14 +1252,6 @@
             <pc:docMk/>
             <pc:sldMk cId="544240998" sldId="296"/>
             <ac:spMk id="5" creationId="{872B1A98-DEE0-5D29-35D6-BCFFECFFA395}"/>
-          </ac:spMkLst>
-        </pc:spChg>
-        <pc:spChg chg="add del mod">
-          <ac:chgData name="Edson Utazi" userId="bcb3a38a-3ad0-4389-89a4-f1f4b25807d3" providerId="ADAL" clId="{6E6BB287-36A5-4019-B86C-EECBD7B9E602}" dt="2026-10-07T21:30:54.393" v="27784" actId="478"/>
-          <ac:spMkLst>
-            <pc:docMk/>
-            <pc:sldMk cId="544240998" sldId="296"/>
-            <ac:spMk id="7" creationId="{795CBEB1-57A0-32B7-BF18-55675F460B6E}"/>
           </ac:spMkLst>
         </pc:spChg>
         <pc:spChg chg="add mod">
@@ -1691,41 +1325,18 @@
           </ac:graphicFrameMkLst>
         </pc:graphicFrameChg>
       </pc:sldChg>
-      <pc:sldChg chg="modSp new del mod">
-        <pc:chgData name="Edson Utazi" userId="bcb3a38a-3ad0-4389-89a4-f1f4b25807d3" providerId="ADAL" clId="{6E6BB287-36A5-4019-B86C-EECBD7B9E602}" dt="2026-10-07T10:12:57.903" v="24009" actId="2696"/>
-        <pc:sldMkLst>
-          <pc:docMk/>
-          <pc:sldMk cId="2273005595" sldId="299"/>
-        </pc:sldMkLst>
-      </pc:sldChg>
       <pc:sldChg chg="addSp delSp modSp new mod">
         <pc:chgData name="Edson Utazi" userId="bcb3a38a-3ad0-4389-89a4-f1f4b25807d3" providerId="ADAL" clId="{6E6BB287-36A5-4019-B86C-EECBD7B9E602}" dt="2026-10-08T06:42:40.426" v="28658" actId="20577"/>
         <pc:sldMkLst>
           <pc:docMk/>
           <pc:sldMk cId="2085718046" sldId="300"/>
         </pc:sldMkLst>
-        <pc:spChg chg="del mod">
-          <ac:chgData name="Edson Utazi" userId="bcb3a38a-3ad0-4389-89a4-f1f4b25807d3" providerId="ADAL" clId="{6E6BB287-36A5-4019-B86C-EECBD7B9E602}" dt="2026-10-07T21:28:27.392" v="27758" actId="478"/>
-          <ac:spMkLst>
-            <pc:docMk/>
-            <pc:sldMk cId="2085718046" sldId="300"/>
-            <ac:spMk id="2" creationId="{2CCB3C44-8E59-FD08-5A16-3E2804911725}"/>
-          </ac:spMkLst>
-        </pc:spChg>
         <pc:spChg chg="mod">
           <ac:chgData name="Edson Utazi" userId="bcb3a38a-3ad0-4389-89a4-f1f4b25807d3" providerId="ADAL" clId="{6E6BB287-36A5-4019-B86C-EECBD7B9E602}" dt="2026-10-08T06:41:52.733" v="28634" actId="20577"/>
           <ac:spMkLst>
             <pc:docMk/>
             <pc:sldMk cId="2085718046" sldId="300"/>
             <ac:spMk id="3" creationId="{E10FDA91-6129-1896-D006-3B385918A5CF}"/>
-          </ac:spMkLst>
-        </pc:spChg>
-        <pc:spChg chg="add del mod">
-          <ac:chgData name="Edson Utazi" userId="bcb3a38a-3ad0-4389-89a4-f1f4b25807d3" providerId="ADAL" clId="{6E6BB287-36A5-4019-B86C-EECBD7B9E602}" dt="2026-10-07T21:28:30.294" v="27759" actId="478"/>
-          <ac:spMkLst>
-            <pc:docMk/>
-            <pc:sldMk cId="2085718046" sldId="300"/>
-            <ac:spMk id="6" creationId="{3B838DA1-EB11-B3CD-2307-918F21D3FBAC}"/>
           </ac:spMkLst>
         </pc:spChg>
         <pc:spChg chg="add mod">
@@ -1759,22 +1370,6 @@
           <pc:docMk/>
           <pc:sldMk cId="315583448" sldId="301"/>
         </pc:sldMkLst>
-        <pc:spChg chg="add del mod">
-          <ac:chgData name="Edson Utazi" userId="bcb3a38a-3ad0-4389-89a4-f1f4b25807d3" providerId="ADAL" clId="{6E6BB287-36A5-4019-B86C-EECBD7B9E602}" dt="2026-10-07T21:24:25.030" v="27718" actId="478"/>
-          <ac:spMkLst>
-            <pc:docMk/>
-            <pc:sldMk cId="315583448" sldId="301"/>
-            <ac:spMk id="4" creationId="{264A5437-3FA4-CC6E-E98A-34C6C6186E6F}"/>
-          </ac:spMkLst>
-        </pc:spChg>
-        <pc:spChg chg="add del mod">
-          <ac:chgData name="Edson Utazi" userId="bcb3a38a-3ad0-4389-89a4-f1f4b25807d3" providerId="ADAL" clId="{6E6BB287-36A5-4019-B86C-EECBD7B9E602}" dt="2026-10-07T21:24:27.963" v="27719" actId="478"/>
-          <ac:spMkLst>
-            <pc:docMk/>
-            <pc:sldMk cId="315583448" sldId="301"/>
-            <ac:spMk id="6" creationId="{A98CB5D5-275D-2E05-6862-3C8BB4E377CD}"/>
-          </ac:spMkLst>
-        </pc:spChg>
         <pc:spChg chg="add mod">
           <ac:chgData name="Edson Utazi" userId="bcb3a38a-3ad0-4389-89a4-f1f4b25807d3" providerId="ADAL" clId="{6E6BB287-36A5-4019-B86C-EECBD7B9E602}" dt="2026-09-21T19:27:13.899" v="20037" actId="20577"/>
           <ac:spMkLst>
@@ -1806,22 +1401,6 @@
           <pc:docMk/>
           <pc:sldMk cId="1557804400" sldId="302"/>
         </pc:sldMkLst>
-        <pc:spChg chg="add del mod">
-          <ac:chgData name="Edson Utazi" userId="bcb3a38a-3ad0-4389-89a4-f1f4b25807d3" providerId="ADAL" clId="{6E6BB287-36A5-4019-B86C-EECBD7B9E602}" dt="2026-10-07T21:28:00.970" v="27753" actId="478"/>
-          <ac:spMkLst>
-            <pc:docMk/>
-            <pc:sldMk cId="1557804400" sldId="302"/>
-            <ac:spMk id="4" creationId="{07F4F00B-77D0-3850-1C83-650F25524DDF}"/>
-          </ac:spMkLst>
-        </pc:spChg>
-        <pc:spChg chg="add del mod">
-          <ac:chgData name="Edson Utazi" userId="bcb3a38a-3ad0-4389-89a4-f1f4b25807d3" providerId="ADAL" clId="{6E6BB287-36A5-4019-B86C-EECBD7B9E602}" dt="2026-10-07T21:28:05.605" v="27754" actId="478"/>
-          <ac:spMkLst>
-            <pc:docMk/>
-            <pc:sldMk cId="1557804400" sldId="302"/>
-            <ac:spMk id="5" creationId="{53680854-C5C2-588E-B299-7F34C95FC48B}"/>
-          </ac:spMkLst>
-        </pc:spChg>
         <pc:spChg chg="add mod">
           <ac:chgData name="Edson Utazi" userId="bcb3a38a-3ad0-4389-89a4-f1f4b25807d3" providerId="ADAL" clId="{6E6BB287-36A5-4019-B86C-EECBD7B9E602}" dt="2026-10-07T21:28:15.455" v="27757" actId="1076"/>
           <ac:spMkLst>
@@ -1846,13 +1425,6 @@
             <ac:graphicFrameMk id="6" creationId="{8FC08F60-EC3C-E874-FB7A-30CFDD7A3968}"/>
           </ac:graphicFrameMkLst>
         </pc:graphicFrameChg>
-      </pc:sldChg>
-      <pc:sldChg chg="modSp new del mod ord">
-        <pc:chgData name="Edson Utazi" userId="bcb3a38a-3ad0-4389-89a4-f1f4b25807d3" providerId="ADAL" clId="{6E6BB287-36A5-4019-B86C-EECBD7B9E602}" dt="2026-10-07T10:12:51.588" v="24008" actId="2696"/>
-        <pc:sldMkLst>
-          <pc:docMk/>
-          <pc:sldMk cId="261184954" sldId="303"/>
-        </pc:sldMkLst>
       </pc:sldChg>
       <pc:sldChg chg="modSp new mod">
         <pc:chgData name="Edson Utazi" userId="bcb3a38a-3ad0-4389-89a4-f1f4b25807d3" providerId="ADAL" clId="{6E6BB287-36A5-4019-B86C-EECBD7B9E602}" dt="2026-10-07T21:10:38.809" v="27577" actId="1076"/>
@@ -1883,14 +1455,6 @@
           <pc:docMk/>
           <pc:sldMk cId="1518404218" sldId="305"/>
         </pc:sldMkLst>
-        <pc:spChg chg="del mod">
-          <ac:chgData name="Edson Utazi" userId="bcb3a38a-3ad0-4389-89a4-f1f4b25807d3" providerId="ADAL" clId="{6E6BB287-36A5-4019-B86C-EECBD7B9E602}" dt="2026-10-07T21:12:43.785" v="27599" actId="478"/>
-          <ac:spMkLst>
-            <pc:docMk/>
-            <pc:sldMk cId="1518404218" sldId="305"/>
-            <ac:spMk id="2" creationId="{35CF6846-8012-F255-566B-97246B8C5753}"/>
-          </ac:spMkLst>
-        </pc:spChg>
         <pc:spChg chg="mod">
           <ac:chgData name="Edson Utazi" userId="bcb3a38a-3ad0-4389-89a4-f1f4b25807d3" providerId="ADAL" clId="{6E6BB287-36A5-4019-B86C-EECBD7B9E602}" dt="2026-09-23T09:54:48.526" v="22256" actId="20577"/>
           <ac:spMkLst>
@@ -1913,14 +1477,6 @@
             <pc:docMk/>
             <pc:sldMk cId="1518404218" sldId="305"/>
             <ac:spMk id="8" creationId="{507B2CBC-1EAD-F13C-8AC3-9AD3461CABE1}"/>
-          </ac:spMkLst>
-        </pc:spChg>
-        <pc:spChg chg="add del mod">
-          <ac:chgData name="Edson Utazi" userId="bcb3a38a-3ad0-4389-89a4-f1f4b25807d3" providerId="ADAL" clId="{6E6BB287-36A5-4019-B86C-EECBD7B9E602}" dt="2026-10-07T21:12:45.943" v="27600" actId="478"/>
-          <ac:spMkLst>
-            <pc:docMk/>
-            <pc:sldMk cId="1518404218" sldId="305"/>
-            <ac:spMk id="9" creationId="{C527A442-3AC8-48BC-B730-578EBB08CCDD}"/>
           </ac:spMkLst>
         </pc:spChg>
         <pc:spChg chg="add mod">
@@ -2016,38 +1572,6 @@
           <pc:docMk/>
           <pc:sldMk cId="2937827611" sldId="308"/>
         </pc:sldMkLst>
-        <pc:spChg chg="del">
-          <ac:chgData name="Edson Utazi" userId="bcb3a38a-3ad0-4389-89a4-f1f4b25807d3" providerId="ADAL" clId="{6E6BB287-36A5-4019-B86C-EECBD7B9E602}" dt="2026-10-07T09:52:41.523" v="23571" actId="478"/>
-          <ac:spMkLst>
-            <pc:docMk/>
-            <pc:sldMk cId="2937827611" sldId="308"/>
-            <ac:spMk id="2" creationId="{5134BA2A-66DC-39F2-CF9E-DFA568FA6976}"/>
-          </ac:spMkLst>
-        </pc:spChg>
-        <pc:spChg chg="del">
-          <ac:chgData name="Edson Utazi" userId="bcb3a38a-3ad0-4389-89a4-f1f4b25807d3" providerId="ADAL" clId="{6E6BB287-36A5-4019-B86C-EECBD7B9E602}" dt="2026-10-07T09:47:02.923" v="23520" actId="478"/>
-          <ac:spMkLst>
-            <pc:docMk/>
-            <pc:sldMk cId="2937827611" sldId="308"/>
-            <ac:spMk id="3" creationId="{39A189E8-BCC5-F0EC-46E2-2F3135D9D5BE}"/>
-          </ac:spMkLst>
-        </pc:spChg>
-        <pc:spChg chg="add del mod">
-          <ac:chgData name="Edson Utazi" userId="bcb3a38a-3ad0-4389-89a4-f1f4b25807d3" providerId="ADAL" clId="{6E6BB287-36A5-4019-B86C-EECBD7B9E602}" dt="2026-10-07T21:11:44.487" v="27591" actId="478"/>
-          <ac:spMkLst>
-            <pc:docMk/>
-            <pc:sldMk cId="2937827611" sldId="308"/>
-            <ac:spMk id="6" creationId="{AA0825CE-F419-1221-15DE-A86D23D6ED18}"/>
-          </ac:spMkLst>
-        </pc:spChg>
-        <pc:spChg chg="add del mod">
-          <ac:chgData name="Edson Utazi" userId="bcb3a38a-3ad0-4389-89a4-f1f4b25807d3" providerId="ADAL" clId="{6E6BB287-36A5-4019-B86C-EECBD7B9E602}" dt="2026-10-07T21:11:47.081" v="27592" actId="478"/>
-          <ac:spMkLst>
-            <pc:docMk/>
-            <pc:sldMk cId="2937827611" sldId="308"/>
-            <ac:spMk id="8" creationId="{D89760B9-B5FC-5150-F6F5-5A06E00B9BC6}"/>
-          </ac:spMkLst>
-        </pc:spChg>
         <pc:spChg chg="add mod">
           <ac:chgData name="Edson Utazi" userId="bcb3a38a-3ad0-4389-89a4-f1f4b25807d3" providerId="ADAL" clId="{6E6BB287-36A5-4019-B86C-EECBD7B9E602}" dt="2026-10-07T21:12:30.784" v="27598" actId="27636"/>
           <ac:spMkLst>
@@ -2102,36 +1626,12 @@
           <pc:docMk/>
           <pc:sldMk cId="1617162915" sldId="310"/>
         </pc:sldMkLst>
-        <pc:spChg chg="del">
-          <ac:chgData name="Edson Utazi" userId="bcb3a38a-3ad0-4389-89a4-f1f4b25807d3" providerId="ADAL" clId="{6E6BB287-36A5-4019-B86C-EECBD7B9E602}" dt="2026-10-07T12:18:43.352" v="24385" actId="478"/>
-          <ac:spMkLst>
-            <pc:docMk/>
-            <pc:sldMk cId="1617162915" sldId="310"/>
-            <ac:spMk id="2" creationId="{03C30DB1-6050-C86C-8C7B-B9EF3E6E96A5}"/>
-          </ac:spMkLst>
-        </pc:spChg>
         <pc:spChg chg="mod">
           <ac:chgData name="Edson Utazi" userId="bcb3a38a-3ad0-4389-89a4-f1f4b25807d3" providerId="ADAL" clId="{6E6BB287-36A5-4019-B86C-EECBD7B9E602}" dt="2026-10-07T21:25:56.553" v="27735" actId="1076"/>
           <ac:spMkLst>
             <pc:docMk/>
             <pc:sldMk cId="1617162915" sldId="310"/>
             <ac:spMk id="3" creationId="{FC6159C4-6D90-768D-589F-96E10E8211BD}"/>
-          </ac:spMkLst>
-        </pc:spChg>
-        <pc:spChg chg="add del mod">
-          <ac:chgData name="Edson Utazi" userId="bcb3a38a-3ad0-4389-89a4-f1f4b25807d3" providerId="ADAL" clId="{6E6BB287-36A5-4019-B86C-EECBD7B9E602}" dt="2026-10-07T21:25:46.605" v="27732" actId="478"/>
-          <ac:spMkLst>
-            <pc:docMk/>
-            <pc:sldMk cId="1617162915" sldId="310"/>
-            <ac:spMk id="4" creationId="{85C45617-7EC9-5198-969E-D6C8C816B380}"/>
-          </ac:spMkLst>
-        </pc:spChg>
-        <pc:spChg chg="add del mod">
-          <ac:chgData name="Edson Utazi" userId="bcb3a38a-3ad0-4389-89a4-f1f4b25807d3" providerId="ADAL" clId="{6E6BB287-36A5-4019-B86C-EECBD7B9E602}" dt="2026-10-07T21:25:49.981" v="27733" actId="478"/>
-          <ac:spMkLst>
-            <pc:docMk/>
-            <pc:sldMk cId="1617162915" sldId="310"/>
-            <ac:spMk id="7" creationId="{F10FEA90-8704-881E-E8E0-E57E53F1AB5D}"/>
           </ac:spMkLst>
         </pc:spChg>
         <pc:spChg chg="add mod">
@@ -2166,13 +1666,6 @@
           </ac:spMkLst>
         </pc:spChg>
       </pc:sldChg>
-      <pc:sldChg chg="new del">
-        <pc:chgData name="Edson Utazi" userId="bcb3a38a-3ad0-4389-89a4-f1f4b25807d3" providerId="ADAL" clId="{6E6BB287-36A5-4019-B86C-EECBD7B9E602}" dt="2026-10-07T20:54:46.309" v="27339" actId="2696"/>
-        <pc:sldMkLst>
-          <pc:docMk/>
-          <pc:sldMk cId="2215425753" sldId="312"/>
-        </pc:sldMkLst>
-      </pc:sldChg>
       <pc:sldChg chg="addSp delSp modSp add mod">
         <pc:chgData name="Edson Utazi" userId="bcb3a38a-3ad0-4389-89a4-f1f4b25807d3" providerId="ADAL" clId="{6E6BB287-36A5-4019-B86C-EECBD7B9E602}" dt="2026-10-07T21:41:30.503" v="27960" actId="1076"/>
         <pc:sldMkLst>
@@ -2185,14 +1678,6 @@
             <pc:docMk/>
             <pc:sldMk cId="587861640" sldId="321"/>
             <ac:spMk id="3" creationId="{00000000-0000-0000-0000-000000000000}"/>
-          </ac:spMkLst>
-        </pc:spChg>
-        <pc:spChg chg="del">
-          <ac:chgData name="Edson Utazi" userId="bcb3a38a-3ad0-4389-89a4-f1f4b25807d3" providerId="ADAL" clId="{6E6BB287-36A5-4019-B86C-EECBD7B9E602}" dt="2026-10-07T21:41:19.252" v="27957" actId="478"/>
-          <ac:spMkLst>
-            <pc:docMk/>
-            <pc:sldMk cId="587861640" sldId="321"/>
-            <ac:spMk id="11" creationId="{15B5CD77-DF08-07E7-CAF6-74A859DE56B2}"/>
           </ac:spMkLst>
         </pc:spChg>
         <pc:spChg chg="mod">
@@ -2211,14 +1696,6 @@
             <ac:spMk id="144" creationId="{00000000-0000-0000-0000-000000000000}"/>
           </ac:spMkLst>
         </pc:spChg>
-        <pc:picChg chg="del">
-          <ac:chgData name="Edson Utazi" userId="bcb3a38a-3ad0-4389-89a4-f1f4b25807d3" providerId="ADAL" clId="{6E6BB287-36A5-4019-B86C-EECBD7B9E602}" dt="2026-10-07T21:02:10.084" v="27389" actId="478"/>
-          <ac:picMkLst>
-            <pc:docMk/>
-            <pc:sldMk cId="587861640" sldId="321"/>
-            <ac:picMk id="4" creationId="{00000000-0000-0000-0000-000000000000}"/>
-          </ac:picMkLst>
-        </pc:picChg>
         <pc:picChg chg="add mod">
           <ac:chgData name="Edson Utazi" userId="bcb3a38a-3ad0-4389-89a4-f1f4b25807d3" providerId="ADAL" clId="{6E6BB287-36A5-4019-B86C-EECBD7B9E602}" dt="2026-10-07T21:03:27.513" v="27404" actId="1076"/>
           <ac:picMkLst>
@@ -2235,36 +1712,12 @@
             <ac:picMk id="9" creationId="{49DD535F-9456-13E4-5EB7-7326A0099AAC}"/>
           </ac:picMkLst>
         </pc:picChg>
-        <pc:picChg chg="del mod">
-          <ac:chgData name="Edson Utazi" userId="bcb3a38a-3ad0-4389-89a4-f1f4b25807d3" providerId="ADAL" clId="{6E6BB287-36A5-4019-B86C-EECBD7B9E602}" dt="2026-10-07T21:40:12.554" v="27945" actId="478"/>
-          <ac:picMkLst>
-            <pc:docMk/>
-            <pc:sldMk cId="587861640" sldId="321"/>
-            <ac:picMk id="10" creationId="{00000000-0000-0000-0000-000000000000}"/>
-          </ac:picMkLst>
-        </pc:picChg>
-        <pc:picChg chg="add del">
-          <ac:chgData name="Edson Utazi" userId="bcb3a38a-3ad0-4389-89a4-f1f4b25807d3" providerId="ADAL" clId="{6E6BB287-36A5-4019-B86C-EECBD7B9E602}" dt="2026-10-07T21:40:36.041" v="27948" actId="478"/>
-          <ac:picMkLst>
-            <pc:docMk/>
-            <pc:sldMk cId="587861640" sldId="321"/>
-            <ac:picMk id="12" creationId="{10265A17-5254-B83F-FDCE-DEE1024621C6}"/>
-          </ac:picMkLst>
-        </pc:picChg>
         <pc:picChg chg="add mod modCrop">
           <ac:chgData name="Edson Utazi" userId="bcb3a38a-3ad0-4389-89a4-f1f4b25807d3" providerId="ADAL" clId="{6E6BB287-36A5-4019-B86C-EECBD7B9E602}" dt="2026-10-07T21:41:26.033" v="27959" actId="1076"/>
           <ac:picMkLst>
             <pc:docMk/>
             <pc:sldMk cId="587861640" sldId="321"/>
             <ac:picMk id="13" creationId="{C0679261-FDE1-5A03-6963-FE84A5C275E7}"/>
-          </ac:picMkLst>
-        </pc:picChg>
-        <pc:picChg chg="del">
-          <ac:chgData name="Edson Utazi" userId="bcb3a38a-3ad0-4389-89a4-f1f4b25807d3" providerId="ADAL" clId="{6E6BB287-36A5-4019-B86C-EECBD7B9E602}" dt="2026-10-07T21:02:12.753" v="27390" actId="478"/>
-          <ac:picMkLst>
-            <pc:docMk/>
-            <pc:sldMk cId="587861640" sldId="321"/>
-            <ac:picMk id="149" creationId="{00000000-0000-0000-0000-000000000000}"/>
           </ac:picMkLst>
         </pc:picChg>
         <pc:cxnChg chg="mod">
@@ -2276,36 +1729,35 @@
           </ac:cxnSpMkLst>
         </pc:cxnChg>
       </pc:sldChg>
+      <pc:sldChg chg="modSp new mod">
+        <pc:chgData name="Edson Utazi" userId="bcb3a38a-3ad0-4389-89a4-f1f4b25807d3" providerId="ADAL" clId="{6E6BB287-36A5-4019-B86C-EECBD7B9E602}" dt="2026-10-11T17:47:14.326" v="29045" actId="1076"/>
+        <pc:sldMkLst>
+          <pc:docMk/>
+          <pc:sldMk cId="1332933936" sldId="322"/>
+        </pc:sldMkLst>
+        <pc:spChg chg="mod">
+          <ac:chgData name="Edson Utazi" userId="bcb3a38a-3ad0-4389-89a4-f1f4b25807d3" providerId="ADAL" clId="{6E6BB287-36A5-4019-B86C-EECBD7B9E602}" dt="2026-10-11T16:27:38.522" v="28994" actId="207"/>
+          <ac:spMkLst>
+            <pc:docMk/>
+            <pc:sldMk cId="1332933936" sldId="322"/>
+            <ac:spMk id="2" creationId="{451993D4-756A-2E0B-B86D-1E6B1765347A}"/>
+          </ac:spMkLst>
+        </pc:spChg>
+        <pc:spChg chg="mod">
+          <ac:chgData name="Edson Utazi" userId="bcb3a38a-3ad0-4389-89a4-f1f4b25807d3" providerId="ADAL" clId="{6E6BB287-36A5-4019-B86C-EECBD7B9E602}" dt="2026-10-11T17:47:14.326" v="29045" actId="1076"/>
+          <ac:spMkLst>
+            <pc:docMk/>
+            <pc:sldMk cId="1332933936" sldId="322"/>
+            <ac:spMk id="3" creationId="{500CAB20-B7CF-7C28-2303-5589EBC21A95}"/>
+          </ac:spMkLst>
+        </pc:spChg>
+      </pc:sldChg>
       <pc:sldMasterChg chg="addSp delSp modSp mod">
         <pc:chgData name="Edson Utazi" userId="bcb3a38a-3ad0-4389-89a4-f1f4b25807d3" providerId="ADAL" clId="{6E6BB287-36A5-4019-B86C-EECBD7B9E602}" dt="2026-10-07T21:07:16.608" v="27430" actId="14100"/>
         <pc:sldMasterMkLst>
           <pc:docMk/>
           <pc:sldMasterMk cId="2850399362" sldId="2147483648"/>
         </pc:sldMasterMkLst>
-        <pc:spChg chg="add del mod">
-          <ac:chgData name="Edson Utazi" userId="bcb3a38a-3ad0-4389-89a4-f1f4b25807d3" providerId="ADAL" clId="{6E6BB287-36A5-4019-B86C-EECBD7B9E602}" dt="2026-10-07T21:07:03.933" v="27427" actId="478"/>
-          <ac:spMkLst>
-            <pc:docMk/>
-            <pc:sldMasterMk cId="2850399362" sldId="2147483648"/>
-            <ac:spMk id="7" creationId="{C0D41A75-17E8-3B28-68FC-3C068EFDAF8F}"/>
-          </ac:spMkLst>
-        </pc:spChg>
-        <pc:spChg chg="add del mod">
-          <ac:chgData name="Edson Utazi" userId="bcb3a38a-3ad0-4389-89a4-f1f4b25807d3" providerId="ADAL" clId="{6E6BB287-36A5-4019-B86C-EECBD7B9E602}" dt="2026-10-07T21:06:08.883" v="27420" actId="478"/>
-          <ac:spMkLst>
-            <pc:docMk/>
-            <pc:sldMasterMk cId="2850399362" sldId="2147483648"/>
-            <ac:spMk id="9" creationId="{9AC132D5-0253-B8DD-301F-36111EB9A6FA}"/>
-          </ac:spMkLst>
-        </pc:spChg>
-        <pc:spChg chg="add del mod">
-          <ac:chgData name="Edson Utazi" userId="bcb3a38a-3ad0-4389-89a4-f1f4b25807d3" providerId="ADAL" clId="{6E6BB287-36A5-4019-B86C-EECBD7B9E602}" dt="2026-10-07T21:06:28.410" v="27423" actId="478"/>
-          <ac:spMkLst>
-            <pc:docMk/>
-            <pc:sldMasterMk cId="2850399362" sldId="2147483648"/>
-            <ac:spMk id="10" creationId="{C39F7C14-1703-4109-E390-8C99DB472CBD}"/>
-          </ac:spMkLst>
-        </pc:spChg>
         <pc:spChg chg="add mod">
           <ac:chgData name="Edson Utazi" userId="bcb3a38a-3ad0-4389-89a4-f1f4b25807d3" providerId="ADAL" clId="{6E6BB287-36A5-4019-B86C-EECBD7B9E602}" dt="2026-10-07T21:06:53.439" v="27426" actId="2085"/>
           <ac:spMkLst>
@@ -2410,7 +1862,7 @@
           <a:p>
             <a:fld id="{C8DC7C70-7B5E-4C1C-AB18-FC05CD59880A}" type="datetimeFigureOut">
               <a:rPr lang="en-GB" smtClean="0"/>
-              <a:t>08/10/2026</a:t>
+              <a:t>11/10/2026</a:t>
             </a:fld>
             <a:endParaRPr lang="en-GB"/>
           </a:p>
@@ -3110,7 +2562,7 @@
           <a:p>
             <a:fld id="{96DFC5B5-4C55-46BD-A9EB-5068F0E7A235}" type="datetime1">
               <a:rPr lang="en-GB" smtClean="0"/>
-              <a:t>08/10/2026</a:t>
+              <a:t>11/10/2026</a:t>
             </a:fld>
             <a:endParaRPr lang="en-GB"/>
           </a:p>
@@ -3310,7 +2762,7 @@
           <a:p>
             <a:fld id="{0AF115E5-BE2E-4C5E-A3DE-5B5DD8AD4A36}" type="datetime1">
               <a:rPr lang="en-GB" smtClean="0"/>
-              <a:t>08/10/2026</a:t>
+              <a:t>11/10/2026</a:t>
             </a:fld>
             <a:endParaRPr lang="en-GB"/>
           </a:p>
@@ -3520,7 +2972,7 @@
           <a:p>
             <a:fld id="{97F57F90-4DD1-4358-9493-3824C7952DA1}" type="datetime1">
               <a:rPr lang="en-GB" smtClean="0"/>
-              <a:t>08/10/2026</a:t>
+              <a:t>11/10/2026</a:t>
             </a:fld>
             <a:endParaRPr lang="en-GB"/>
           </a:p>
@@ -3948,7 +3400,7 @@
           <a:p>
             <a:fld id="{5064CE49-7FCD-4206-9E70-2A32DA76F15F}" type="datetime1">
               <a:rPr lang="en-GB" smtClean="0"/>
-              <a:t>08/10/2026</a:t>
+              <a:t>11/10/2026</a:t>
             </a:fld>
             <a:endParaRPr lang="en-GB"/>
           </a:p>
@@ -4224,7 +3676,7 @@
           <a:p>
             <a:fld id="{43F2A214-2A68-4476-ADBE-BD32126D101B}" type="datetime1">
               <a:rPr lang="en-GB" smtClean="0"/>
-              <a:t>08/10/2026</a:t>
+              <a:t>11/10/2026</a:t>
             </a:fld>
             <a:endParaRPr lang="en-GB"/>
           </a:p>
@@ -4492,7 +3944,7 @@
           <a:p>
             <a:fld id="{4EAD07A6-FDB0-4D4B-9EE7-5B8968D1C315}" type="datetime1">
               <a:rPr lang="en-GB" smtClean="0"/>
-              <a:t>08/10/2026</a:t>
+              <a:t>11/10/2026</a:t>
             </a:fld>
             <a:endParaRPr lang="en-GB"/>
           </a:p>
@@ -4907,7 +4359,7 @@
           <a:p>
             <a:fld id="{00A015CF-F68C-48CC-B69D-FB8EE8E40665}" type="datetime1">
               <a:rPr lang="en-GB" smtClean="0"/>
-              <a:t>08/10/2026</a:t>
+              <a:t>11/10/2026</a:t>
             </a:fld>
             <a:endParaRPr lang="en-GB"/>
           </a:p>
@@ -5049,7 +4501,7 @@
           <a:p>
             <a:fld id="{4B696EC3-BD2A-4703-9988-1081BB80949D}" type="datetime1">
               <a:rPr lang="en-GB" smtClean="0"/>
-              <a:t>08/10/2026</a:t>
+              <a:t>11/10/2026</a:t>
             </a:fld>
             <a:endParaRPr lang="en-GB"/>
           </a:p>
@@ -5162,7 +4614,7 @@
           <a:p>
             <a:fld id="{01D68C9D-7B4F-4A20-AD96-0570605D7207}" type="datetime1">
               <a:rPr lang="en-GB" smtClean="0"/>
-              <a:t>08/10/2026</a:t>
+              <a:t>11/10/2026</a:t>
             </a:fld>
             <a:endParaRPr lang="en-GB"/>
           </a:p>
@@ -5475,7 +4927,7 @@
           <a:p>
             <a:fld id="{2E1FFB1C-3E24-47F8-80B7-4AFDD77B49CF}" type="datetime1">
               <a:rPr lang="en-GB" smtClean="0"/>
-              <a:t>08/10/2026</a:t>
+              <a:t>11/10/2026</a:t>
             </a:fld>
             <a:endParaRPr lang="en-GB"/>
           </a:p>
@@ -5764,7 +5216,7 @@
           <a:p>
             <a:fld id="{1EA78B13-AD1D-4114-9ED1-C88B46CDBFEA}" type="datetime1">
               <a:rPr lang="en-GB" smtClean="0"/>
-              <a:t>08/10/2026</a:t>
+              <a:t>11/10/2026</a:t>
             </a:fld>
             <a:endParaRPr lang="en-GB"/>
           </a:p>
@@ -6007,7 +5459,7 @@
           <a:p>
             <a:fld id="{0A740B95-FC79-4EA1-8D85-7262467523DE}" type="datetime1">
               <a:rPr lang="en-GB" smtClean="0"/>
-              <a:t>08/10/2026</a:t>
+              <a:t>11/10/2026</a:t>
             </a:fld>
             <a:endParaRPr lang="en-GB"/>
           </a:p>
@@ -12804,28 +12256,16 @@
           <a:p>
             <a:pPr lvl="1"/>
             <a:r>
-              <a:rPr lang="en-GB" b="1" dirty="0"/>
-              <a:t>Apply</a:t>
+              <a:rPr lang="en-GB" dirty="0"/>
+              <a:t>Apply basic INLA and </a:t>
+            </a:r>
+            <a:r>
+              <a:rPr lang="en-GB" dirty="0" err="1"/>
+              <a:t>inlabru</a:t>
             </a:r>
             <a:r>
               <a:rPr lang="en-GB" dirty="0"/>
-              <a:t> basic </a:t>
-            </a:r>
-            <a:r>
-              <a:rPr lang="en-GB" b="1" dirty="0"/>
-              <a:t>INLA and </a:t>
-            </a:r>
-            <a:r>
-              <a:rPr lang="en-GB" b="1" dirty="0" err="1"/>
-              <a:t>inlabru</a:t>
-            </a:r>
-            <a:r>
-              <a:rPr lang="en-GB" b="1" dirty="0"/>
-              <a:t> syntax</a:t>
-            </a:r>
-            <a:r>
-              <a:rPr lang="en-GB" dirty="0"/>
-              <a:t> to implement and fit Bayesian statistical models and interpret the key outputs</a:t>
+              <a:t> syntax to implement and fit Bayesian statistical models and interpret the key outputs</a:t>
             </a:r>
           </a:p>
         </p:txBody>
@@ -12929,8 +12369,8 @@
           </a:p>
         </p:txBody>
       </p:sp>
-      <mc:AlternateContent xmlns:mc="http://schemas.openxmlformats.org/markup-compatibility/2006" xmlns:a14="http://schemas.microsoft.com/office/drawing/2010/main">
-        <mc:Choice Requires="a14">
+      <mc:AlternateContent xmlns:mc="http://schemas.openxmlformats.org/markup-compatibility/2006">
+        <mc:Choice xmlns:a14="http://schemas.microsoft.com/office/drawing/2010/main" Requires="a14">
           <p:sp>
             <p:nvSpPr>
               <p:cNvPr id="6" name="Content Placeholder 5">
@@ -12949,8 +12389,8 @@
             </p:nvSpPr>
             <p:spPr>
               <a:xfrm>
-                <a:off x="752475" y="1130914"/>
-                <a:ext cx="10515600" cy="5430581"/>
+                <a:off x="762934" y="1148951"/>
+                <a:ext cx="10515600" cy="5093229"/>
               </a:xfrm>
             </p:spPr>
             <p:txBody>
@@ -13044,7 +12484,7 @@
               <a:p>
                 <a:r>
                   <a:rPr lang="en-GB" dirty="0"/>
-                  <a:t>Bayes estimators provide a mechanism to chooser a reasonable estimator </a:t>
+                  <a:t>Bayes estimators provide a mechanism to choose a reasonable estimator </a:t>
                 </a:r>
                 <a14:m>
                   <m:oMath xmlns:m="http://schemas.openxmlformats.org/officeDocument/2006/math">
@@ -13339,7 +12779,7 @@
             </p:txBody>
           </p:sp>
         </mc:Choice>
-        <mc:Fallback xmlns="">
+        <mc:Fallback>
           <p:sp>
             <p:nvSpPr>
               <p:cNvPr id="6" name="Content Placeholder 5">
@@ -13358,13 +12798,13 @@
             </p:nvSpPr>
             <p:spPr>
               <a:xfrm>
-                <a:off x="752475" y="1130914"/>
-                <a:ext cx="10515600" cy="5430581"/>
+                <a:off x="762934" y="1148951"/>
+                <a:ext cx="10515600" cy="5093229"/>
               </a:xfrm>
               <a:blipFill>
                 <a:blip r:embed="rId2"/>
                 <a:stretch>
-                  <a:fillRect l="-1043" t="-2584" r="-1449"/>
+                  <a:fillRect l="-1043" t="-2632" r="-1449" b="-2153"/>
                 </a:stretch>
               </a:blipFill>
             </p:spPr>
@@ -13397,7 +12837,7 @@
         </p:nvCxnSpPr>
         <p:spPr>
           <a:xfrm flipH="1">
-            <a:off x="5272856" y="4024773"/>
+            <a:off x="5300849" y="3810165"/>
             <a:ext cx="1268361" cy="698091"/>
           </a:xfrm>
           <a:prstGeom prst="straightConnector1">
@@ -13436,7 +12876,7 @@
         </p:nvSpPr>
         <p:spPr>
           <a:xfrm>
-            <a:off x="4132314" y="4732696"/>
+            <a:off x="4160307" y="4518088"/>
             <a:ext cx="2408903" cy="646331"/>
           </a:xfrm>
           <a:prstGeom prst="rect">
@@ -13473,7 +12913,7 @@
         </p:nvCxnSpPr>
         <p:spPr>
           <a:xfrm>
-            <a:off x="7175397" y="4078850"/>
+            <a:off x="7203390" y="3864242"/>
             <a:ext cx="201562" cy="346582"/>
           </a:xfrm>
           <a:prstGeom prst="straightConnector1">
@@ -13512,7 +12952,7 @@
         </p:nvSpPr>
         <p:spPr>
           <a:xfrm>
-            <a:off x="6541217" y="4404615"/>
+            <a:off x="6569210" y="4190007"/>
             <a:ext cx="2664542" cy="646331"/>
           </a:xfrm>
           <a:prstGeom prst="rect">
@@ -16824,8 +16264,8 @@
           <a:chExt cx="0" cy="0"/>
         </a:xfrm>
       </p:grpSpPr>
-      <mc:AlternateContent xmlns:mc="http://schemas.openxmlformats.org/markup-compatibility/2006" xmlns:a14="http://schemas.microsoft.com/office/drawing/2010/main">
-        <mc:Choice Requires="a14">
+      <mc:AlternateContent xmlns:mc="http://schemas.openxmlformats.org/markup-compatibility/2006">
+        <mc:Choice xmlns:a14="http://schemas.microsoft.com/office/drawing/2010/main" Requires="a14">
           <p:sp>
             <p:nvSpPr>
               <p:cNvPr id="3" name="Content Placeholder 2">
@@ -16850,7 +16290,7 @@
             </p:spPr>
             <p:txBody>
               <a:bodyPr>
-                <a:normAutofit lnSpcReduction="10000"/>
+                <a:normAutofit fontScale="92500"/>
               </a:bodyPr>
               <a:lstStyle/>
               <a:p>
@@ -16878,6 +16318,13 @@
                 <a:r>
                   <a:rPr lang="en-GB" dirty="0"/>
                   <a:t>The posterior mean or median</a:t>
+                </a:r>
+              </a:p>
+              <a:p>
+                <a:pPr lvl="1"/>
+                <a:r>
+                  <a:rPr lang="en-GB" dirty="0"/>
+                  <a:t>The posterior standard deviation</a:t>
                 </a:r>
               </a:p>
               <a:p>
@@ -17113,7 +16560,7 @@
             </p:txBody>
           </p:sp>
         </mc:Choice>
-        <mc:Fallback xmlns="">
+        <mc:Fallback>
           <p:sp>
             <p:nvSpPr>
               <p:cNvPr id="3" name="Content Placeholder 2">
@@ -17138,7 +16585,7 @@
               <a:blipFill>
                 <a:blip r:embed="rId2"/>
                 <a:stretch>
-                  <a:fillRect l="-1043" t="-3814"/>
+                  <a:fillRect l="-928" t="-2653" r="-232"/>
                 </a:stretch>
               </a:blipFill>
             </p:spPr>
@@ -18004,7 +17451,7 @@
         </p:nvSpPr>
         <p:spPr>
           <a:xfrm>
-            <a:off x="838200" y="1443069"/>
+            <a:off x="838200" y="1377755"/>
             <a:ext cx="10515600" cy="4351338"/>
           </a:xfrm>
         </p:spPr>
@@ -18014,7 +17461,7 @@
           <a:p>
             <a:r>
               <a:rPr lang="en-GB" dirty="0"/>
-              <a:t>Modern Bayesian computation consider the integration problem as another statistical problem</a:t>
+              <a:t>Modern Bayesian computation considers the integration problem as another statistical problem</a:t>
             </a:r>
           </a:p>
           <a:p>
@@ -18130,8 +17577,8 @@
           <a:chExt cx="0" cy="0"/>
         </a:xfrm>
       </p:grpSpPr>
-      <mc:AlternateContent xmlns:mc="http://schemas.openxmlformats.org/markup-compatibility/2006" xmlns:a14="http://schemas.microsoft.com/office/drawing/2010/main">
-        <mc:Choice Requires="a14">
+      <mc:AlternateContent xmlns:mc="http://schemas.openxmlformats.org/markup-compatibility/2006">
+        <mc:Choice xmlns:a14="http://schemas.microsoft.com/office/drawing/2010/main" Requires="a14">
           <p:sp>
             <p:nvSpPr>
               <p:cNvPr id="3" name="Content Placeholder 2">
@@ -18173,7 +17620,7 @@
                 </a:r>
                 <a:r>
                   <a:rPr lang="en-GB" dirty="0"/>
-                  <a:t>method do exactly this.</a:t>
+                  <a:t>methods do exactly this.</a:t>
                 </a:r>
               </a:p>
               <a:p>
@@ -18560,7 +18007,7 @@
             </p:txBody>
           </p:sp>
         </mc:Choice>
-        <mc:Fallback xmlns="">
+        <mc:Fallback>
           <p:sp>
             <p:nvSpPr>
               <p:cNvPr id="3" name="Content Placeholder 2">
@@ -19864,8 +19311,8 @@
           </a:p>
         </p:txBody>
       </p:sp>
-      <mc:AlternateContent xmlns:mc="http://schemas.openxmlformats.org/markup-compatibility/2006" xmlns:a14="http://schemas.microsoft.com/office/drawing/2010/main">
-        <mc:Choice Requires="a14">
+      <mc:AlternateContent xmlns:mc="http://schemas.openxmlformats.org/markup-compatibility/2006">
+        <mc:Choice xmlns:a14="http://schemas.microsoft.com/office/drawing/2010/main" Requires="a14">
           <p:sp>
             <p:nvSpPr>
               <p:cNvPr id="3" name="Content Placeholder 2">
@@ -20576,12 +20023,31 @@
                       </a:rPr>
                       <m:t>⁡(</m:t>
                     </m:r>
-                    <m:r>
-                      <a:rPr lang="en-GB" sz="3100" b="0" i="1" smtClean="0">
-                        <a:latin typeface="Cambria Math" panose="02040503050406030204" pitchFamily="18" charset="0"/>
-                      </a:rPr>
-                      <m:t>𝜆</m:t>
-                    </m:r>
+                    <m:sSub>
+                      <m:sSubPr>
+                        <m:ctrlPr>
+                          <a:rPr lang="en-GB" sz="3100" b="0" i="1" smtClean="0">
+                            <a:latin typeface="Cambria Math" panose="02040503050406030204" pitchFamily="18" charset="0"/>
+                          </a:rPr>
+                        </m:ctrlPr>
+                      </m:sSubPr>
+                      <m:e>
+                        <m:r>
+                          <a:rPr lang="en-GB" sz="3100" b="0" i="1" smtClean="0">
+                            <a:latin typeface="Cambria Math" panose="02040503050406030204" pitchFamily="18" charset="0"/>
+                          </a:rPr>
+                          <m:t>𝜆</m:t>
+                        </m:r>
+                      </m:e>
+                      <m:sub>
+                        <m:r>
+                          <a:rPr lang="en-GB" sz="3100" b="0" i="1" smtClean="0">
+                            <a:latin typeface="Cambria Math" panose="02040503050406030204" pitchFamily="18" charset="0"/>
+                          </a:rPr>
+                          <m:t>𝑖</m:t>
+                        </m:r>
+                      </m:sub>
+                    </m:sSub>
                     <m:r>
                       <a:rPr lang="en-GB" sz="3100" b="0" i="1" smtClean="0">
                         <a:latin typeface="Cambria Math" panose="02040503050406030204" pitchFamily="18" charset="0"/>
@@ -20614,7 +20080,7 @@
             </p:txBody>
           </p:sp>
         </mc:Choice>
-        <mc:Fallback xmlns="">
+        <mc:Fallback>
           <p:sp>
             <p:nvSpPr>
               <p:cNvPr id="3" name="Content Placeholder 2">
@@ -25108,8 +24574,8 @@
           <a:chExt cx="0" cy="0"/>
         </a:xfrm>
       </p:grpSpPr>
-      <mc:AlternateContent xmlns:mc="http://schemas.openxmlformats.org/markup-compatibility/2006" xmlns:a14="http://schemas.microsoft.com/office/drawing/2010/main">
-        <mc:Choice Requires="a14">
+      <mc:AlternateContent xmlns:mc="http://schemas.openxmlformats.org/markup-compatibility/2006">
+        <mc:Choice xmlns:a14="http://schemas.microsoft.com/office/drawing/2010/main" Requires="a14">
           <p:sp>
             <p:nvSpPr>
               <p:cNvPr id="3" name="Content Placeholder 2">
@@ -25128,15 +24594,142 @@
             </p:nvSpPr>
             <p:spPr>
               <a:xfrm>
-                <a:off x="838200" y="1540490"/>
+                <a:off x="749710" y="1303125"/>
                 <a:ext cx="10515600" cy="4351338"/>
               </a:xfrm>
             </p:spPr>
             <p:txBody>
               <a:bodyPr>
-                <a:normAutofit lnSpcReduction="10000"/>
+                <a:normAutofit fontScale="92500" lnSpcReduction="20000"/>
               </a:bodyPr>
               <a:lstStyle/>
+              <a:p>
+                <a:pPr marL="0" indent="0">
+                  <a:buNone/>
+                </a:pPr>
+                <a:r>
+                  <a:rPr lang="en-GB" b="1" dirty="0">
+                    <a:solidFill>
+                      <a:schemeClr val="tx2">
+                        <a:lumMod val="75000"/>
+                        <a:lumOff val="25000"/>
+                      </a:schemeClr>
+                    </a:solidFill>
+                  </a:rPr>
+                  <a:t>Approximating</a:t>
+                </a:r>
+                <a:r>
+                  <a:rPr lang="en-GB" dirty="0">
+                    <a:solidFill>
+                      <a:schemeClr val="tx2">
+                        <a:lumMod val="75000"/>
+                        <a:lumOff val="25000"/>
+                      </a:schemeClr>
+                    </a:solidFill>
+                  </a:rPr>
+                  <a:t> </a:t>
+                </a:r>
+                <a14:m>
+                  <m:oMath xmlns:m="http://schemas.openxmlformats.org/officeDocument/2006/math">
+                    <m:r>
+                      <a:rPr lang="en-GB" i="1">
+                        <a:solidFill>
+                          <a:schemeClr val="tx2">
+                            <a:lumMod val="75000"/>
+                            <a:lumOff val="25000"/>
+                          </a:schemeClr>
+                        </a:solidFill>
+                        <a:latin typeface="Cambria Math" panose="02040503050406030204" pitchFamily="18" charset="0"/>
+                      </a:rPr>
+                      <m:t>𝑝</m:t>
+                    </m:r>
+                    <m:d>
+                      <m:dPr>
+                        <m:ctrlPr>
+                          <a:rPr lang="en-GB" i="1">
+                            <a:solidFill>
+                              <a:schemeClr val="tx2">
+                                <a:lumMod val="75000"/>
+                                <a:lumOff val="25000"/>
+                              </a:schemeClr>
+                            </a:solidFill>
+                            <a:latin typeface="Cambria Math" panose="02040503050406030204" pitchFamily="18" charset="0"/>
+                          </a:rPr>
+                        </m:ctrlPr>
+                      </m:dPr>
+                      <m:e>
+                        <m:sSub>
+                          <m:sSubPr>
+                            <m:ctrlPr>
+                              <a:rPr lang="en-GB">
+                                <a:solidFill>
+                                  <a:schemeClr val="tx2">
+                                    <a:lumMod val="75000"/>
+                                    <a:lumOff val="25000"/>
+                                  </a:schemeClr>
+                                </a:solidFill>
+                                <a:latin typeface="Cambria Math" panose="02040503050406030204" pitchFamily="18" charset="0"/>
+                              </a:rPr>
+                            </m:ctrlPr>
+                          </m:sSubPr>
+                          <m:e>
+                            <m:r>
+                              <m:rPr>
+                                <m:sty m:val="p"/>
+                              </m:rPr>
+                              <a:rPr lang="en-GB">
+                                <a:solidFill>
+                                  <a:schemeClr val="tx2">
+                                    <a:lumMod val="75000"/>
+                                    <a:lumOff val="25000"/>
+                                  </a:schemeClr>
+                                </a:solidFill>
+                                <a:latin typeface="Cambria Math" panose="02040503050406030204" pitchFamily="18" charset="0"/>
+                              </a:rPr>
+                              <m:t>x</m:t>
+                            </m:r>
+                          </m:e>
+                          <m:sub>
+                            <m:r>
+                              <a:rPr lang="en-GB" i="1">
+                                <a:solidFill>
+                                  <a:schemeClr val="tx2">
+                                    <a:lumMod val="75000"/>
+                                    <a:lumOff val="25000"/>
+                                  </a:schemeClr>
+                                </a:solidFill>
+                                <a:latin typeface="Cambria Math" panose="02040503050406030204" pitchFamily="18" charset="0"/>
+                              </a:rPr>
+                              <m:t>𝑖</m:t>
+                            </m:r>
+                          </m:sub>
+                        </m:sSub>
+                      </m:e>
+                      <m:e>
+                        <m:r>
+                          <a:rPr lang="en-GB" b="1" i="1">
+                            <a:solidFill>
+                              <a:schemeClr val="tx2">
+                                <a:lumMod val="75000"/>
+                                <a:lumOff val="25000"/>
+                              </a:schemeClr>
+                            </a:solidFill>
+                            <a:latin typeface="Cambria Math" panose="02040503050406030204" pitchFamily="18" charset="0"/>
+                          </a:rPr>
+                          <m:t>𝒚</m:t>
+                        </m:r>
+                      </m:e>
+                    </m:d>
+                  </m:oMath>
+                </a14:m>
+                <a:endParaRPr lang="en-GB" dirty="0"/>
+              </a:p>
+              <a:p>
+                <a:pPr marL="0" indent="0">
+                  <a:buNone/>
+                </a:pPr>
+                <a:endParaRPr lang="en-GB" dirty="0"/>
+              </a:p>
               <a:p>
                 <a:r>
                   <a:rPr lang="en-GB" dirty="0"/>
@@ -25366,7 +24959,10 @@
                 <a:r>
                   <a:rPr lang="en-GB" dirty="0">
                     <a:solidFill>
-                      <a:srgbClr val="FF0000"/>
+                      <a:schemeClr val="tx2">
+                        <a:lumMod val="75000"/>
+                        <a:lumOff val="25000"/>
+                      </a:schemeClr>
                     </a:solidFill>
                   </a:rPr>
                   <a:t>exploiting the Gaussian structure and the sparse nature of the precision matrix, </a:t>
@@ -25376,7 +24972,10 @@
                     <m:r>
                       <a:rPr lang="en-GB" b="1" i="1" smtClean="0">
                         <a:solidFill>
-                          <a:srgbClr val="FF0000"/>
+                          <a:schemeClr val="tx2">
+                            <a:lumMod val="75000"/>
+                            <a:lumOff val="25000"/>
+                          </a:schemeClr>
                         </a:solidFill>
                         <a:latin typeface="Cambria Math" panose="02040503050406030204" pitchFamily="18" charset="0"/>
                       </a:rPr>
@@ -25387,7 +24986,10 @@
                 <a:r>
                   <a:rPr lang="en-GB" dirty="0">
                     <a:solidFill>
-                      <a:srgbClr val="FF0000"/>
+                      <a:schemeClr val="tx2">
+                        <a:lumMod val="75000"/>
+                        <a:lumOff val="25000"/>
+                      </a:schemeClr>
                     </a:solidFill>
                   </a:rPr>
                   <a:t> (</a:t>
@@ -25397,7 +24999,10 @@
                     <m:r>
                       <a:rPr lang="en-GB" b="1" i="0" smtClean="0">
                         <a:solidFill>
-                          <a:srgbClr val="FF0000"/>
+                          <a:schemeClr val="tx2">
+                            <a:lumMod val="75000"/>
+                            <a:lumOff val="25000"/>
+                          </a:schemeClr>
                         </a:solidFill>
                         <a:latin typeface="Cambria Math" panose="02040503050406030204" pitchFamily="18" charset="0"/>
                       </a:rPr>
@@ -25408,7 +25013,10 @@
                 <a:r>
                   <a:rPr lang="en-GB" dirty="0">
                     <a:solidFill>
-                      <a:srgbClr val="FF0000"/>
+                      <a:schemeClr val="tx2">
+                        <a:lumMod val="75000"/>
+                        <a:lumOff val="25000"/>
+                      </a:schemeClr>
                     </a:solidFill>
                   </a:rPr>
                   <a:t> is assumed to be a GMRF*)</a:t>
@@ -25573,7 +25181,7 @@
             </p:txBody>
           </p:sp>
         </mc:Choice>
-        <mc:Fallback xmlns="">
+        <mc:Fallback>
           <p:sp>
             <p:nvSpPr>
               <p:cNvPr id="3" name="Content Placeholder 2">
@@ -25592,13 +25200,13 @@
             </p:nvSpPr>
             <p:spPr>
               <a:xfrm>
-                <a:off x="838200" y="1540490"/>
+                <a:off x="749710" y="1303125"/>
                 <a:ext cx="10515600" cy="4351338"/>
               </a:xfrm>
               <a:blipFill>
                 <a:blip r:embed="rId2"/>
                 <a:stretch>
-                  <a:fillRect l="-1043" t="-3221"/>
+                  <a:fillRect l="-1043" t="-3501"/>
                 </a:stretch>
               </a:blipFill>
             </p:spPr>
@@ -25716,6 +25324,88 @@
                 </a:solidFill>
               </a:rPr>
               <a:t>What does INLA actually calculate?</a:t>
+            </a:r>
+          </a:p>
+        </p:txBody>
+      </p:sp>
+      <p:cxnSp>
+        <p:nvCxnSpPr>
+          <p:cNvPr id="6" name="Straight Arrow Connector 5">
+            <a:extLst>
+              <a:ext uri="{FF2B5EF4-FFF2-40B4-BE49-F238E27FC236}">
+                <a16:creationId xmlns:a16="http://schemas.microsoft.com/office/drawing/2014/main" id="{9BB7C94F-8757-79BD-F9E7-E79EAD21A22E}"/>
+              </a:ext>
+            </a:extLst>
+          </p:cNvPr>
+          <p:cNvCxnSpPr>
+            <a:cxnSpLocks/>
+            <a:endCxn id="7" idx="1"/>
+          </p:cNvCxnSpPr>
+          <p:nvPr/>
+        </p:nvCxnSpPr>
+        <p:spPr>
+          <a:xfrm flipV="1">
+            <a:off x="2892490" y="2444620"/>
+            <a:ext cx="7536025" cy="984380"/>
+          </a:xfrm>
+          <a:prstGeom prst="straightConnector1">
+            <a:avLst/>
+          </a:prstGeom>
+          <a:ln>
+            <a:tailEnd type="triangle"/>
+          </a:ln>
+        </p:spPr>
+        <p:style>
+          <a:lnRef idx="2">
+            <a:schemeClr val="accent1"/>
+          </a:lnRef>
+          <a:fillRef idx="0">
+            <a:schemeClr val="accent1"/>
+          </a:fillRef>
+          <a:effectRef idx="1">
+            <a:schemeClr val="accent1"/>
+          </a:effectRef>
+          <a:fontRef idx="minor">
+            <a:schemeClr val="tx1"/>
+          </a:fontRef>
+        </p:style>
+      </p:cxnSp>
+      <p:sp>
+        <p:nvSpPr>
+          <p:cNvPr id="7" name="TextBox 6">
+            <a:extLst>
+              <a:ext uri="{FF2B5EF4-FFF2-40B4-BE49-F238E27FC236}">
+                <a16:creationId xmlns:a16="http://schemas.microsoft.com/office/drawing/2014/main" id="{4E504794-D02B-50C3-4914-DC4B172D9DAE}"/>
+              </a:ext>
+            </a:extLst>
+          </p:cNvPr>
+          <p:cNvSpPr txBox="1"/>
+          <p:nvPr/>
+        </p:nvSpPr>
+        <p:spPr>
+          <a:xfrm>
+            <a:off x="10428515" y="1982955"/>
+            <a:ext cx="1763485" cy="923330"/>
+          </a:xfrm>
+          <a:prstGeom prst="rect">
+            <a:avLst/>
+          </a:prstGeom>
+          <a:noFill/>
+          <a:ln>
+            <a:solidFill>
+              <a:schemeClr val="accent1"/>
+            </a:solidFill>
+          </a:ln>
+        </p:spPr>
+        <p:txBody>
+          <a:bodyPr wrap="square" rtlCol="0">
+            <a:spAutoFit/>
+          </a:bodyPr>
+          <a:lstStyle/>
+          <a:p>
+            <a:r>
+              <a:rPr lang="en-GB" dirty="0"/>
+              <a:t>INLA’s main computational feature</a:t>
             </a:r>
           </a:p>
         </p:txBody>
@@ -26349,8 +26039,8 @@
           <a:chExt cx="0" cy="0"/>
         </a:xfrm>
       </p:grpSpPr>
-      <mc:AlternateContent xmlns:mc="http://schemas.openxmlformats.org/markup-compatibility/2006" xmlns:a14="http://schemas.microsoft.com/office/drawing/2010/main">
-        <mc:Choice Requires="a14">
+      <mc:AlternateContent xmlns:mc="http://schemas.openxmlformats.org/markup-compatibility/2006">
+        <mc:Choice xmlns:a14="http://schemas.microsoft.com/office/drawing/2010/main" Requires="a14">
           <p:sp>
             <p:nvSpPr>
               <p:cNvPr id="3" name="Content Placeholder 2">
@@ -26381,7 +26071,22 @@
               <a:p>
                 <a:r>
                   <a:rPr lang="en-GB" dirty="0"/>
-                  <a:t>Answer: Specifically, using a Gaussian approximation of the posterior distribution of the latent field </a:t>
+                  <a:t>Answer: Specifically, using a </a:t>
+                </a:r>
+                <a:r>
+                  <a:rPr lang="en-GB" dirty="0">
+                    <a:solidFill>
+                      <a:schemeClr val="tx2">
+                        <a:lumMod val="75000"/>
+                        <a:lumOff val="25000"/>
+                      </a:schemeClr>
+                    </a:solidFill>
+                  </a:rPr>
+                  <a:t>Gaussian approximation </a:t>
+                </a:r>
+                <a:r>
+                  <a:rPr lang="en-GB" dirty="0"/>
+                  <a:t>of the posterior distribution of the latent field </a:t>
                 </a:r>
                 <a14:m>
                   <m:oMath xmlns:m="http://schemas.openxmlformats.org/officeDocument/2006/math">
@@ -26671,10 +26376,7 @@
                 <a:r>
                   <a:rPr lang="en-GB" dirty="0">
                     <a:solidFill>
-                      <a:schemeClr val="tx2">
-                        <a:lumMod val="75000"/>
-                        <a:lumOff val="25000"/>
-                      </a:schemeClr>
+                      <a:schemeClr val="tx1"/>
                     </a:solidFill>
                   </a:rPr>
                   <a:t>the posterior density of the hyperparameters </a:t>
@@ -26684,10 +26386,7 @@
                     <m:r>
                       <a:rPr lang="en-GB" b="1" i="1" smtClean="0">
                         <a:solidFill>
-                          <a:schemeClr val="tx2">
-                            <a:lumMod val="75000"/>
-                            <a:lumOff val="25000"/>
-                          </a:schemeClr>
+                          <a:schemeClr val="tx1"/>
                         </a:solidFill>
                         <a:latin typeface="Cambria Math" panose="02040503050406030204" pitchFamily="18" charset="0"/>
                       </a:rPr>
@@ -26698,13 +26397,22 @@
                 <a:r>
                   <a:rPr lang="en-GB" b="1" dirty="0">
                     <a:solidFill>
-                      <a:schemeClr val="tx2">
-                        <a:lumMod val="75000"/>
-                        <a:lumOff val="25000"/>
-                      </a:schemeClr>
+                      <a:schemeClr val="tx1"/>
                     </a:solidFill>
                   </a:rPr>
                   <a:t> </a:t>
+                </a:r>
+                <a:r>
+                  <a:rPr lang="en-GB" dirty="0">
+                    <a:solidFill>
+                      <a:schemeClr val="tx1"/>
+                    </a:solidFill>
+                  </a:rPr>
+                  <a:t>is approximated </a:t>
+                </a:r>
+                <a:r>
+                  <a:rPr lang="en-GB" dirty="0"/>
+                  <a:t>(using </a:t>
                 </a:r>
                 <a:r>
                   <a:rPr lang="en-GB" dirty="0">
@@ -26715,11 +26423,11 @@
                       </a:schemeClr>
                     </a:solidFill>
                   </a:rPr>
-                  <a:t>is approximated </a:t>
+                  <a:t>Laplace approximation</a:t>
                 </a:r>
                 <a:r>
                   <a:rPr lang="en-GB" dirty="0"/>
-                  <a:t>(using Laplace approximation) as </a:t>
+                  <a:t>) as </a:t>
                 </a:r>
               </a:p>
               <a:p>
@@ -27014,7 +26722,7 @@
             </p:txBody>
           </p:sp>
         </mc:Choice>
-        <mc:Fallback xmlns="">
+        <mc:Fallback>
           <p:sp>
             <p:nvSpPr>
               <p:cNvPr id="3" name="Content Placeholder 2">
@@ -27410,41 +27118,6 @@
           </p:sp>
         </mc:Fallback>
       </mc:AlternateContent>
-      <p:sp>
-        <p:nvSpPr>
-          <p:cNvPr id="6" name="TextBox 5">
-            <a:extLst>
-              <a:ext uri="{FF2B5EF4-FFF2-40B4-BE49-F238E27FC236}">
-                <a16:creationId xmlns:a16="http://schemas.microsoft.com/office/drawing/2014/main" id="{300DB3D0-4F69-6C1F-4B29-CAD6B7C036AF}"/>
-              </a:ext>
-            </a:extLst>
-          </p:cNvPr>
-          <p:cNvSpPr txBox="1"/>
-          <p:nvPr/>
-        </p:nvSpPr>
-        <p:spPr>
-          <a:xfrm>
-            <a:off x="766916" y="6548284"/>
-            <a:ext cx="7364361" cy="369332"/>
-          </a:xfrm>
-          <a:prstGeom prst="rect">
-            <a:avLst/>
-          </a:prstGeom>
-          <a:noFill/>
-        </p:spPr>
-        <p:txBody>
-          <a:bodyPr wrap="square" rtlCol="0">
-            <a:spAutoFit/>
-          </a:bodyPr>
-          <a:lstStyle/>
-          <a:p>
-            <a:r>
-              <a:rPr lang="en-GB" dirty="0"/>
-              <a:t>Note on Laplace approximation…..</a:t>
-            </a:r>
-          </a:p>
-        </p:txBody>
-      </p:sp>
       <p:sp>
         <p:nvSpPr>
           <p:cNvPr id="2" name="Slide Number Placeholder 1">
@@ -27513,6 +27186,126 @@
           </a:p>
         </p:txBody>
       </p:sp>
+      <p:cxnSp>
+        <p:nvCxnSpPr>
+          <p:cNvPr id="7" name="Straight Arrow Connector 6">
+            <a:extLst>
+              <a:ext uri="{FF2B5EF4-FFF2-40B4-BE49-F238E27FC236}">
+                <a16:creationId xmlns:a16="http://schemas.microsoft.com/office/drawing/2014/main" id="{D4B3499D-F800-F396-9EFC-EB6BD63A8447}"/>
+              </a:ext>
+            </a:extLst>
+          </p:cNvPr>
+          <p:cNvCxnSpPr/>
+          <p:nvPr/>
+        </p:nvCxnSpPr>
+        <p:spPr>
+          <a:xfrm>
+            <a:off x="7473820" y="1670180"/>
+            <a:ext cx="2985796" cy="2836506"/>
+          </a:xfrm>
+          <a:prstGeom prst="straightConnector1">
+            <a:avLst/>
+          </a:prstGeom>
+          <a:ln>
+            <a:tailEnd type="triangle"/>
+          </a:ln>
+        </p:spPr>
+        <p:style>
+          <a:lnRef idx="2">
+            <a:schemeClr val="accent1"/>
+          </a:lnRef>
+          <a:fillRef idx="0">
+            <a:schemeClr val="accent1"/>
+          </a:fillRef>
+          <a:effectRef idx="1">
+            <a:schemeClr val="accent1"/>
+          </a:effectRef>
+          <a:fontRef idx="minor">
+            <a:schemeClr val="tx1"/>
+          </a:fontRef>
+        </p:style>
+      </p:cxnSp>
+      <p:cxnSp>
+        <p:nvCxnSpPr>
+          <p:cNvPr id="8" name="Straight Arrow Connector 7">
+            <a:extLst>
+              <a:ext uri="{FF2B5EF4-FFF2-40B4-BE49-F238E27FC236}">
+                <a16:creationId xmlns:a16="http://schemas.microsoft.com/office/drawing/2014/main" id="{E101BCBB-C962-90EF-B147-23DCD566E8A0}"/>
+              </a:ext>
+            </a:extLst>
+          </p:cNvPr>
+          <p:cNvCxnSpPr>
+            <a:cxnSpLocks/>
+          </p:cNvCxnSpPr>
+          <p:nvPr/>
+        </p:nvCxnSpPr>
+        <p:spPr>
+          <a:xfrm>
+            <a:off x="4718181" y="4021494"/>
+            <a:ext cx="5741435" cy="485192"/>
+          </a:xfrm>
+          <a:prstGeom prst="straightConnector1">
+            <a:avLst/>
+          </a:prstGeom>
+          <a:ln>
+            <a:tailEnd type="triangle"/>
+          </a:ln>
+        </p:spPr>
+        <p:style>
+          <a:lnRef idx="2">
+            <a:schemeClr val="accent1"/>
+          </a:lnRef>
+          <a:fillRef idx="0">
+            <a:schemeClr val="accent1"/>
+          </a:fillRef>
+          <a:effectRef idx="1">
+            <a:schemeClr val="accent1"/>
+          </a:effectRef>
+          <a:fontRef idx="minor">
+            <a:schemeClr val="tx1"/>
+          </a:fontRef>
+        </p:style>
+      </p:cxnSp>
+      <p:sp>
+        <p:nvSpPr>
+          <p:cNvPr id="11" name="TextBox 10">
+            <a:extLst>
+              <a:ext uri="{FF2B5EF4-FFF2-40B4-BE49-F238E27FC236}">
+                <a16:creationId xmlns:a16="http://schemas.microsoft.com/office/drawing/2014/main" id="{9BCAD435-21B7-F56F-A1E6-4411C127410F}"/>
+              </a:ext>
+            </a:extLst>
+          </p:cNvPr>
+          <p:cNvSpPr txBox="1"/>
+          <p:nvPr/>
+        </p:nvSpPr>
+        <p:spPr>
+          <a:xfrm>
+            <a:off x="10409853" y="4133461"/>
+            <a:ext cx="1782147" cy="646331"/>
+          </a:xfrm>
+          <a:prstGeom prst="rect">
+            <a:avLst/>
+          </a:prstGeom>
+          <a:noFill/>
+          <a:ln>
+            <a:solidFill>
+              <a:schemeClr val="accent1"/>
+            </a:solidFill>
+          </a:ln>
+        </p:spPr>
+        <p:txBody>
+          <a:bodyPr wrap="square" rtlCol="0">
+            <a:spAutoFit/>
+          </a:bodyPr>
+          <a:lstStyle/>
+          <a:p>
+            <a:r>
+              <a:rPr lang="en-GB" dirty="0"/>
+              <a:t>Analytical approximations</a:t>
+            </a:r>
+          </a:p>
+        </p:txBody>
+      </p:sp>
     </p:spTree>
     <p:extLst>
       <p:ext uri="{BB962C8B-B14F-4D97-AF65-F5344CB8AC3E}">
@@ -27543,8 +27336,8 @@
           <a:chExt cx="0" cy="0"/>
         </a:xfrm>
       </p:grpSpPr>
-      <mc:AlternateContent xmlns:mc="http://schemas.openxmlformats.org/markup-compatibility/2006" xmlns:a14="http://schemas.microsoft.com/office/drawing/2010/main">
-        <mc:Choice Requires="a14">
+      <mc:AlternateContent xmlns:mc="http://schemas.openxmlformats.org/markup-compatibility/2006">
+        <mc:Choice xmlns:a14="http://schemas.microsoft.com/office/drawing/2010/main" Requires="a14">
           <p:sp>
             <p:nvSpPr>
               <p:cNvPr id="3" name="Content Placeholder 2">
@@ -27978,7 +27771,22 @@
               <a:p>
                 <a:r>
                   <a:rPr lang="en-GB" dirty="0"/>
-                  <a:t>In the last step, numerical integration (with respect to </a:t>
+                  <a:t>In the last step</a:t>
+                </a:r>
+                <a:r>
+                  <a:rPr lang="en-GB" dirty="0">
+                    <a:solidFill>
+                      <a:schemeClr val="tx2">
+                        <a:lumMod val="75000"/>
+                        <a:lumOff val="25000"/>
+                      </a:schemeClr>
+                    </a:solidFill>
+                  </a:rPr>
+                  <a:t>, numerical integration </a:t>
+                </a:r>
+                <a:r>
+                  <a:rPr lang="en-GB" dirty="0"/>
+                  <a:t>(with respect to </a:t>
                 </a:r>
                 <a14:m>
                   <m:oMath xmlns:m="http://schemas.openxmlformats.org/officeDocument/2006/math">
@@ -28672,13 +28480,74 @@
                 </a:pPr>
                 <a:r>
                   <a:rPr lang="en-GB" sz="1900" dirty="0"/>
-                  <a:t>NB: The integration points are a set of points in the hyperparameter space (placed around the mode where there is substantial posterior probability) and the weights measure how much of the hyperparameter space is represented by each integration point. </a:t>
+                  <a:t>NB: The integration points are a set of points in the hyperparameter space (placed around the mode where there is substantial posterior probability). INLA will obtain these integration points by </a:t>
+                </a:r>
+                <a:r>
+                  <a:rPr lang="en-GB" sz="1900" dirty="0">
+                    <a:solidFill>
+                      <a:schemeClr val="tx2">
+                        <a:lumMod val="75000"/>
+                        <a:lumOff val="25000"/>
+                      </a:schemeClr>
+                    </a:solidFill>
+                  </a:rPr>
+                  <a:t>placing a regular grid about the posterior mode of  </a:t>
+                </a:r>
+                <a14:m>
+                  <m:oMath xmlns:m="http://schemas.openxmlformats.org/officeDocument/2006/math">
+                    <m:r>
+                      <a:rPr lang="en-GB" sz="1900" b="1" i="1" smtClean="0">
+                        <a:solidFill>
+                          <a:schemeClr val="tx2">
+                            <a:lumMod val="75000"/>
+                            <a:lumOff val="25000"/>
+                          </a:schemeClr>
+                        </a:solidFill>
+                        <a:latin typeface="Cambria Math" panose="02040503050406030204" pitchFamily="18" charset="0"/>
+                      </a:rPr>
+                      <m:t>𝜽</m:t>
+                    </m:r>
+                  </m:oMath>
+                </a14:m>
+                <a:r>
+                  <a:rPr lang="en-GB" sz="1900" dirty="0">
+                    <a:solidFill>
+                      <a:schemeClr val="tx2">
+                        <a:lumMod val="75000"/>
+                        <a:lumOff val="25000"/>
+                      </a:schemeClr>
+                    </a:solidFill>
+                  </a:rPr>
+                  <a:t> </a:t>
+                </a:r>
+                <a:r>
+                  <a:rPr lang="en-GB" sz="1900" dirty="0"/>
+                  <a:t>or by using a </a:t>
+                </a:r>
+                <a:r>
+                  <a:rPr lang="en-GB" sz="1900" dirty="0">
+                    <a:solidFill>
+                      <a:schemeClr val="tx2">
+                        <a:lumMod val="75000"/>
+                        <a:lumOff val="25000"/>
+                      </a:schemeClr>
+                    </a:solidFill>
+                  </a:rPr>
+                  <a:t>central composite design </a:t>
+                </a:r>
+                <a:r>
+                  <a:rPr lang="en-GB" sz="1900" dirty="0" err="1"/>
+                  <a:t>centered</a:t>
+                </a:r>
+                <a:r>
+                  <a:rPr lang="en-GB" sz="1900" dirty="0"/>
+                  <a:t> at the posterior mode. The weights measure how much of the hyperparameter space is represented by each integration point. </a:t>
                 </a:r>
               </a:p>
             </p:txBody>
           </p:sp>
         </mc:Choice>
-        <mc:Fallback xmlns="">
+        <mc:Fallback>
           <p:sp>
             <p:nvSpPr>
               <p:cNvPr id="3" name="Content Placeholder 2">
@@ -28703,7 +28572,7 @@
               <a:blipFill>
                 <a:blip r:embed="rId3"/>
                 <a:stretch>
-                  <a:fillRect l="-893" t="-2772" r="-112"/>
+                  <a:fillRect l="-893" t="-2772"/>
                 </a:stretch>
               </a:blipFill>
             </p:spPr>
@@ -29302,7 +29171,7 @@
         </p:nvSpPr>
         <p:spPr>
           <a:xfrm>
-            <a:off x="838200" y="2029645"/>
+            <a:off x="838200" y="2402870"/>
             <a:ext cx="10515600" cy="1497678"/>
           </a:xfrm>
         </p:spPr>
@@ -29409,256 +29278,6 @@
 </file>
 
 <file path=ppt/slides/slide44.xml><?xml version="1.0" encoding="utf-8"?>
-<p:sld xmlns:a="http://schemas.openxmlformats.org/drawingml/2006/main" xmlns:r="http://schemas.openxmlformats.org/officeDocument/2006/relationships" xmlns:p="http://schemas.openxmlformats.org/presentationml/2006/main">
-  <p:cSld>
-    <p:spTree>
-      <p:nvGrpSpPr>
-        <p:cNvPr id="1" name=""/>
-        <p:cNvGrpSpPr/>
-        <p:nvPr/>
-      </p:nvGrpSpPr>
-      <p:grpSpPr>
-        <a:xfrm>
-          <a:off x="0" y="0"/>
-          <a:ext cx="0" cy="0"/>
-          <a:chOff x="0" y="0"/>
-          <a:chExt cx="0" cy="0"/>
-        </a:xfrm>
-      </p:grpSpPr>
-      <p:sp>
-        <p:nvSpPr>
-          <p:cNvPr id="2" name="Title 1">
-            <a:extLst>
-              <a:ext uri="{FF2B5EF4-FFF2-40B4-BE49-F238E27FC236}">
-                <a16:creationId xmlns:a16="http://schemas.microsoft.com/office/drawing/2014/main" id="{5360C929-FE1A-5EB6-9F47-277A941BED90}"/>
-              </a:ext>
-            </a:extLst>
-          </p:cNvPr>
-          <p:cNvSpPr>
-            <a:spLocks noGrp="1"/>
-          </p:cNvSpPr>
-          <p:nvPr>
-            <p:ph type="title"/>
-          </p:nvPr>
-        </p:nvSpPr>
-        <p:spPr>
-          <a:xfrm>
-            <a:off x="353008" y="0"/>
-            <a:ext cx="10515600" cy="810531"/>
-          </a:xfrm>
-        </p:spPr>
-        <p:txBody>
-          <a:bodyPr>
-            <a:normAutofit/>
-          </a:bodyPr>
-          <a:lstStyle/>
-          <a:p>
-            <a:r>
-              <a:rPr lang="en-GB" sz="4000" b="1" dirty="0">
-                <a:solidFill>
-                  <a:schemeClr val="bg1"/>
-                </a:solidFill>
-                <a:latin typeface="+mn-lt"/>
-              </a:rPr>
-              <a:t>Why INLA works for LGMs</a:t>
-            </a:r>
-          </a:p>
-        </p:txBody>
-      </p:sp>
-      <mc:AlternateContent xmlns:mc="http://schemas.openxmlformats.org/markup-compatibility/2006" xmlns:a14="http://schemas.microsoft.com/office/drawing/2010/main">
-        <mc:Choice Requires="a14">
-          <p:sp>
-            <p:nvSpPr>
-              <p:cNvPr id="3" name="Content Placeholder 2">
-                <a:extLst>
-                  <a:ext uri="{FF2B5EF4-FFF2-40B4-BE49-F238E27FC236}">
-                    <a16:creationId xmlns:a16="http://schemas.microsoft.com/office/drawing/2014/main" id="{53654091-AFB6-FC6D-8F0C-E15207010382}"/>
-                  </a:ext>
-                </a:extLst>
-              </p:cNvPr>
-              <p:cNvSpPr>
-                <a:spLocks noGrp="1"/>
-              </p:cNvSpPr>
-              <p:nvPr>
-                <p:ph idx="1"/>
-              </p:nvPr>
-            </p:nvSpPr>
-            <p:spPr>
-              <a:xfrm>
-                <a:off x="838200" y="2096006"/>
-                <a:ext cx="10515600" cy="2665988"/>
-              </a:xfrm>
-            </p:spPr>
-            <p:txBody>
-              <a:bodyPr/>
-              <a:lstStyle/>
-              <a:p>
-                <a:r>
-                  <a:rPr lang="en-GB" dirty="0"/>
-                  <a:t>The main computational feature is the precision matrix, </a:t>
-                </a:r>
-                <a14:m>
-                  <m:oMath xmlns:m="http://schemas.openxmlformats.org/officeDocument/2006/math">
-                    <m:r>
-                      <a:rPr lang="en-GB" b="1" i="0" smtClean="0">
-                        <a:latin typeface="Cambria Math" panose="02040503050406030204" pitchFamily="18" charset="0"/>
-                      </a:rPr>
-                      <m:t>𝐐</m:t>
-                    </m:r>
-                    <m:d>
-                      <m:dPr>
-                        <m:ctrlPr>
-                          <a:rPr lang="en-GB" b="1" i="1" smtClean="0">
-                            <a:latin typeface="Cambria Math" panose="02040503050406030204" pitchFamily="18" charset="0"/>
-                          </a:rPr>
-                        </m:ctrlPr>
-                      </m:dPr>
-                      <m:e>
-                        <m:r>
-                          <a:rPr lang="en-GB" b="1" i="1" smtClean="0">
-                            <a:latin typeface="Cambria Math" panose="02040503050406030204" pitchFamily="18" charset="0"/>
-                          </a:rPr>
-                          <m:t>𝜽</m:t>
-                        </m:r>
-                      </m:e>
-                    </m:d>
-                  </m:oMath>
-                </a14:m>
-                <a:endParaRPr lang="en-GB" b="1" dirty="0"/>
-              </a:p>
-              <a:p>
-                <a:r>
-                  <a:rPr lang="en-GB" dirty="0"/>
-                  <a:t>For many models, e.g., those used in Spatial Statistics, </a:t>
-                </a:r>
-                <a14:m>
-                  <m:oMath xmlns:m="http://schemas.openxmlformats.org/officeDocument/2006/math">
-                    <m:r>
-                      <a:rPr lang="en-GB" b="1" i="1" smtClean="0">
-                        <a:latin typeface="Cambria Math" panose="02040503050406030204" pitchFamily="18" charset="0"/>
-                      </a:rPr>
-                      <m:t>𝑸</m:t>
-                    </m:r>
-                  </m:oMath>
-                </a14:m>
-                <a:r>
-                  <a:rPr lang="en-GB" dirty="0"/>
-                  <a:t> is sparse. This means that most entries in </a:t>
-                </a:r>
-                <a14:m>
-                  <m:oMath xmlns:m="http://schemas.openxmlformats.org/officeDocument/2006/math">
-                    <m:r>
-                      <a:rPr lang="en-GB" b="1" i="1" smtClean="0">
-                        <a:latin typeface="Cambria Math" panose="02040503050406030204" pitchFamily="18" charset="0"/>
-                      </a:rPr>
-                      <m:t>𝑸</m:t>
-                    </m:r>
-                  </m:oMath>
-                </a14:m>
-                <a:r>
-                  <a:rPr lang="en-GB" dirty="0"/>
-                  <a:t> are zero.</a:t>
-                </a:r>
-              </a:p>
-              <a:p>
-                <a:r>
-                  <a:rPr lang="en-GB" dirty="0"/>
-                  <a:t>Thus, instead of manipulating a huge, dense covariance matrix, INLA exploits the sparse precision matrix.</a:t>
-                </a:r>
-              </a:p>
-              <a:p>
-                <a:endParaRPr lang="en-GB" dirty="0"/>
-              </a:p>
-            </p:txBody>
-          </p:sp>
-        </mc:Choice>
-        <mc:Fallback xmlns="">
-          <p:sp>
-            <p:nvSpPr>
-              <p:cNvPr id="3" name="Content Placeholder 2">
-                <a:extLst>
-                  <a:ext uri="{FF2B5EF4-FFF2-40B4-BE49-F238E27FC236}">
-                    <a16:creationId xmlns:a16="http://schemas.microsoft.com/office/drawing/2014/main" id="{53654091-AFB6-FC6D-8F0C-E15207010382}"/>
-                  </a:ext>
-                </a:extLst>
-              </p:cNvPr>
-              <p:cNvSpPr>
-                <a:spLocks noGrp="1" noRot="1" noChangeAspect="1" noMove="1" noResize="1" noEditPoints="1" noAdjustHandles="1" noChangeArrowheads="1" noChangeShapeType="1" noTextEdit="1"/>
-              </p:cNvSpPr>
-              <p:nvPr>
-                <p:ph idx="1"/>
-              </p:nvPr>
-            </p:nvSpPr>
-            <p:spPr>
-              <a:xfrm>
-                <a:off x="838200" y="2096006"/>
-                <a:ext cx="10515600" cy="2665988"/>
-              </a:xfrm>
-              <a:blipFill>
-                <a:blip r:embed="rId2"/>
-                <a:stretch>
-                  <a:fillRect l="-1043" t="-4119"/>
-                </a:stretch>
-              </a:blipFill>
-            </p:spPr>
-            <p:txBody>
-              <a:bodyPr/>
-              <a:lstStyle/>
-              <a:p>
-                <a:r>
-                  <a:rPr lang="en-GB">
-                    <a:noFill/>
-                  </a:rPr>
-                  <a:t> </a:t>
-                </a:r>
-              </a:p>
-            </p:txBody>
-          </p:sp>
-        </mc:Fallback>
-      </mc:AlternateContent>
-      <p:sp>
-        <p:nvSpPr>
-          <p:cNvPr id="4" name="Slide Number Placeholder 3">
-            <a:extLst>
-              <a:ext uri="{FF2B5EF4-FFF2-40B4-BE49-F238E27FC236}">
-                <a16:creationId xmlns:a16="http://schemas.microsoft.com/office/drawing/2014/main" id="{533B9D62-0B6F-586E-3A09-D7355550ABAC}"/>
-              </a:ext>
-            </a:extLst>
-          </p:cNvPr>
-          <p:cNvSpPr>
-            <a:spLocks noGrp="1"/>
-          </p:cNvSpPr>
-          <p:nvPr>
-            <p:ph type="sldNum" sz="quarter" idx="12"/>
-          </p:nvPr>
-        </p:nvSpPr>
-        <p:spPr/>
-        <p:txBody>
-          <a:bodyPr/>
-          <a:lstStyle/>
-          <a:p>
-            <a:fld id="{92E773D0-8039-41DE-9EAA-38744617136D}" type="slidenum">
-              <a:rPr lang="en-GB" smtClean="0"/>
-              <a:t>44</a:t>
-            </a:fld>
-            <a:endParaRPr lang="en-GB"/>
-          </a:p>
-        </p:txBody>
-      </p:sp>
-    </p:spTree>
-    <p:extLst>
-      <p:ext uri="{BB962C8B-B14F-4D97-AF65-F5344CB8AC3E}">
-        <p14:creationId xmlns:p14="http://schemas.microsoft.com/office/powerpoint/2010/main" val="68859822"/>
-      </p:ext>
-    </p:extLst>
-  </p:cSld>
-  <p:clrMapOvr>
-    <a:masterClrMapping/>
-  </p:clrMapOvr>
-</p:sld>
-</file>
-
-<file path=ppt/slides/slide45.xml><?xml version="1.0" encoding="utf-8"?>
 <p:sld xmlns:a="http://schemas.openxmlformats.org/drawingml/2006/main" xmlns:r="http://schemas.openxmlformats.org/officeDocument/2006/relationships" xmlns:p="http://schemas.openxmlformats.org/presentationml/2006/main">
   <p:cSld>
     <p:spTree>
@@ -30337,7 +29956,7 @@
           <a:p>
             <a:fld id="{92E773D0-8039-41DE-9EAA-38744617136D}" type="slidenum">
               <a:rPr lang="en-GB" smtClean="0"/>
-              <a:t>45</a:t>
+              <a:t>44</a:t>
             </a:fld>
             <a:endParaRPr lang="en-GB"/>
           </a:p>
@@ -30504,6 +30123,193 @@
     <p:extLst>
       <p:ext uri="{BB962C8B-B14F-4D97-AF65-F5344CB8AC3E}">
         <p14:creationId xmlns:p14="http://schemas.microsoft.com/office/powerpoint/2010/main" val="992726252"/>
+      </p:ext>
+    </p:extLst>
+  </p:cSld>
+  <p:clrMapOvr>
+    <a:masterClrMapping/>
+  </p:clrMapOvr>
+</p:sld>
+</file>
+
+<file path=ppt/slides/slide45.xml><?xml version="1.0" encoding="utf-8"?>
+<p:sld xmlns:a="http://schemas.openxmlformats.org/drawingml/2006/main" xmlns:r="http://schemas.openxmlformats.org/officeDocument/2006/relationships" xmlns:p="http://schemas.openxmlformats.org/presentationml/2006/main">
+  <p:cSld>
+    <p:spTree>
+      <p:nvGrpSpPr>
+        <p:cNvPr id="1" name=""/>
+        <p:cNvGrpSpPr/>
+        <p:nvPr/>
+      </p:nvGrpSpPr>
+      <p:grpSpPr>
+        <a:xfrm>
+          <a:off x="0" y="0"/>
+          <a:ext cx="0" cy="0"/>
+          <a:chOff x="0" y="0"/>
+          <a:chExt cx="0" cy="0"/>
+        </a:xfrm>
+      </p:grpSpPr>
+      <p:sp>
+        <p:nvSpPr>
+          <p:cNvPr id="2" name="Title 1">
+            <a:extLst>
+              <a:ext uri="{FF2B5EF4-FFF2-40B4-BE49-F238E27FC236}">
+                <a16:creationId xmlns:a16="http://schemas.microsoft.com/office/drawing/2014/main" id="{451993D4-756A-2E0B-B86D-1E6B1765347A}"/>
+              </a:ext>
+            </a:extLst>
+          </p:cNvPr>
+          <p:cNvSpPr>
+            <a:spLocks noGrp="1"/>
+          </p:cNvSpPr>
+          <p:nvPr>
+            <p:ph type="title"/>
+          </p:nvPr>
+        </p:nvSpPr>
+        <p:spPr>
+          <a:xfrm>
+            <a:off x="381000" y="136526"/>
+            <a:ext cx="10515600" cy="544512"/>
+          </a:xfrm>
+        </p:spPr>
+        <p:txBody>
+          <a:bodyPr>
+            <a:normAutofit fontScale="90000"/>
+          </a:bodyPr>
+          <a:lstStyle/>
+          <a:p>
+            <a:r>
+              <a:rPr lang="en-GB" b="1" dirty="0">
+                <a:solidFill>
+                  <a:schemeClr val="bg1"/>
+                </a:solidFill>
+                <a:latin typeface="+mn-lt"/>
+              </a:rPr>
+              <a:t>Class activity</a:t>
+            </a:r>
+          </a:p>
+        </p:txBody>
+      </p:sp>
+      <p:sp>
+        <p:nvSpPr>
+          <p:cNvPr id="3" name="Content Placeholder 2">
+            <a:extLst>
+              <a:ext uri="{FF2B5EF4-FFF2-40B4-BE49-F238E27FC236}">
+                <a16:creationId xmlns:a16="http://schemas.microsoft.com/office/drawing/2014/main" id="{500CAB20-B7CF-7C28-2303-5589EBC21A95}"/>
+              </a:ext>
+            </a:extLst>
+          </p:cNvPr>
+          <p:cNvSpPr>
+            <a:spLocks noGrp="1"/>
+          </p:cNvSpPr>
+          <p:nvPr>
+            <p:ph idx="1"/>
+          </p:nvPr>
+        </p:nvSpPr>
+        <p:spPr>
+          <a:xfrm>
+            <a:off x="502298" y="1354476"/>
+            <a:ext cx="9919997" cy="5001874"/>
+          </a:xfrm>
+        </p:spPr>
+        <p:txBody>
+          <a:bodyPr>
+            <a:normAutofit fontScale="92500" lnSpcReduction="20000"/>
+          </a:bodyPr>
+          <a:lstStyle/>
+          <a:p>
+            <a:r>
+              <a:rPr lang="en-GB" sz="2400" dirty="0"/>
+              <a:t>Suppose you are interested in understanding the factors associated with </a:t>
+            </a:r>
+            <a:r>
+              <a:rPr lang="en-GB" sz="2400" b="1" dirty="0"/>
+              <a:t>economic growth </a:t>
+            </a:r>
+            <a:r>
+              <a:rPr lang="en-GB" sz="2400" dirty="0"/>
+              <a:t>across a set of countries. You have collected annual data on gross domestic product (GDP) per capita over a 20-year period, alongside potential explanatory variables such as education expenditure, foreign direct investment, unemployment rate and inflation. </a:t>
+            </a:r>
+          </a:p>
+          <a:p>
+            <a:r>
+              <a:rPr lang="en-GB" sz="2400" dirty="0"/>
+              <a:t>Your objective is to develop a statistical model to </a:t>
+            </a:r>
+            <a:r>
+              <a:rPr lang="en-GB" sz="2400" b="1" dirty="0"/>
+              <a:t>quantify the associations </a:t>
+            </a:r>
+            <a:r>
+              <a:rPr lang="en-GB" sz="2400" dirty="0"/>
+              <a:t>between these explanatory variables and GDP per capita, while accounting for uncertainty in the estimates and </a:t>
+            </a:r>
+            <a:r>
+              <a:rPr lang="en-GB" sz="2400" b="1" dirty="0"/>
+              <a:t>making predictions </a:t>
+            </a:r>
+            <a:r>
+              <a:rPr lang="en-GB" sz="2400" dirty="0"/>
+              <a:t>for future economic growth.</a:t>
+            </a:r>
+          </a:p>
+          <a:p>
+            <a:r>
+              <a:rPr lang="en-GB" sz="2400" dirty="0"/>
+              <a:t>In </a:t>
+            </a:r>
+            <a:r>
+              <a:rPr lang="en-GB" sz="2400" b="1" dirty="0"/>
+              <a:t>groups</a:t>
+            </a:r>
+            <a:r>
+              <a:rPr lang="en-GB" sz="2400" dirty="0"/>
+              <a:t>, outline how you would approach this problem using a </a:t>
+            </a:r>
+            <a:r>
+              <a:rPr lang="en-GB" sz="2400" b="1" dirty="0"/>
+              <a:t>Bayesian statistical framework</a:t>
+            </a:r>
+            <a:r>
+              <a:rPr lang="en-GB" sz="2400" dirty="0"/>
+              <a:t>. Consider how you would specify the likelihood and choose an appropriate probability distribution for the outcome variable, define the model parameters and assign prior distributions to them, and combine the prior information with the observed data to obtain posterior distributions. Discuss how you would fit the model, summarise and interpret the posterior distributions, assess model adequacy, and generate predictions. Finally, explain how you might use credible intervals to quantify uncertainty in the estimated associations and how your approach would differ from a frequentist analysis.</a:t>
+            </a:r>
+            <a:endParaRPr lang="en-GB" dirty="0"/>
+          </a:p>
+        </p:txBody>
+      </p:sp>
+      <p:sp>
+        <p:nvSpPr>
+          <p:cNvPr id="4" name="Slide Number Placeholder 3">
+            <a:extLst>
+              <a:ext uri="{FF2B5EF4-FFF2-40B4-BE49-F238E27FC236}">
+                <a16:creationId xmlns:a16="http://schemas.microsoft.com/office/drawing/2014/main" id="{7C604D97-C445-CC46-1DA2-F2A603719CBF}"/>
+              </a:ext>
+            </a:extLst>
+          </p:cNvPr>
+          <p:cNvSpPr>
+            <a:spLocks noGrp="1"/>
+          </p:cNvSpPr>
+          <p:nvPr>
+            <p:ph type="sldNum" sz="quarter" idx="12"/>
+          </p:nvPr>
+        </p:nvSpPr>
+        <p:spPr/>
+        <p:txBody>
+          <a:bodyPr/>
+          <a:lstStyle/>
+          <a:p>
+            <a:fld id="{92E773D0-8039-41DE-9EAA-38744617136D}" type="slidenum">
+              <a:rPr lang="en-GB" smtClean="0"/>
+              <a:t>45</a:t>
+            </a:fld>
+            <a:endParaRPr lang="en-GB"/>
+          </a:p>
+        </p:txBody>
+      </p:sp>
+    </p:spTree>
+    <p:extLst>
+      <p:ext uri="{BB962C8B-B14F-4D97-AF65-F5344CB8AC3E}">
+        <p14:creationId xmlns:p14="http://schemas.microsoft.com/office/powerpoint/2010/main" val="1332933936"/>
       </p:ext>
     </p:extLst>
   </p:cSld>
@@ -32715,7 +32521,7 @@
               <a:rPr lang="en-GB" smtClean="0"/>
               <a:t>7</a:t>
             </a:fld>
-            <a:endParaRPr lang="en-GB"/>
+            <a:endParaRPr lang="en-GB" dirty="0"/>
           </a:p>
         </p:txBody>
       </p:sp>

--- a/Day 1 files/Bayesian inference and computation using INLA and inlabru.pptx
+++ b/Day 1 files/Bayesian inference and computation using INLA and inlabru.pptx
@@ -171,7 +171,7 @@
 <file path=ppt/revisionInfo.xml><?xml version="1.0" encoding="utf-8"?>
 <p1510:revInfo xmlns:a="http://schemas.openxmlformats.org/drawingml/2006/main" xmlns:r="http://schemas.openxmlformats.org/officeDocument/2006/relationships" xmlns:p1510="http://schemas.microsoft.com/office/powerpoint/2015/10/main">
   <p1510:revLst>
-    <p1510:client id="{13CA5137-0D92-4A4A-B558-359371908FCD}" v="46" dt="2026-10-11T22:39:54.292"/>
+    <p1510:client id="{13CA5137-0D92-4A4A-B558-359371908FCD}" v="65" dt="2026-10-12T19:32:04.701"/>
   </p1510:revLst>
 </p1510:revInfo>
 </file>
@@ -181,7 +181,7 @@
   <pc:docChgLst>
     <pc:chgData name="Edson Utazi" userId="bcb3a38a-3ad0-4389-89a4-f1f4b25807d3" providerId="ADAL" clId="{6E6BB287-36A5-4019-B86C-EECBD7B9E602}"/>
     <pc:docChg chg="undo custSel addSld delSld modSld sldOrd modMainMaster">
-      <pc:chgData name="Edson Utazi" userId="bcb3a38a-3ad0-4389-89a4-f1f4b25807d3" providerId="ADAL" clId="{6E6BB287-36A5-4019-B86C-EECBD7B9E602}" dt="2026-10-11T22:40:45.420" v="29195" actId="1076"/>
+      <pc:chgData name="Edson Utazi" userId="bcb3a38a-3ad0-4389-89a4-f1f4b25807d3" providerId="ADAL" clId="{6E6BB287-36A5-4019-B86C-EECBD7B9E602}" dt="2026-10-12T19:32:04.701" v="29217" actId="20577"/>
       <pc:docMkLst>
         <pc:docMk/>
       </pc:docMkLst>
@@ -255,7 +255,7 @@
         </pc:spChg>
       </pc:sldChg>
       <pc:sldChg chg="addSp delSp modSp mod">
-        <pc:chgData name="Edson Utazi" userId="bcb3a38a-3ad0-4389-89a4-f1f4b25807d3" providerId="ADAL" clId="{6E6BB287-36A5-4019-B86C-EECBD7B9E602}" dt="2026-10-11T20:32:55.169" v="29052" actId="20577"/>
+        <pc:chgData name="Edson Utazi" userId="bcb3a38a-3ad0-4389-89a4-f1f4b25807d3" providerId="ADAL" clId="{6E6BB287-36A5-4019-B86C-EECBD7B9E602}" dt="2026-10-12T19:32:04.701" v="29217" actId="20577"/>
         <pc:sldMkLst>
           <pc:docMk/>
           <pc:sldMk cId="2586324638" sldId="260"/>
@@ -269,7 +269,7 @@
           </ac:spMkLst>
         </pc:spChg>
         <pc:spChg chg="mod">
-          <ac:chgData name="Edson Utazi" userId="bcb3a38a-3ad0-4389-89a4-f1f4b25807d3" providerId="ADAL" clId="{6E6BB287-36A5-4019-B86C-EECBD7B9E602}" dt="2026-10-11T20:32:55.169" v="29052" actId="20577"/>
+          <ac:chgData name="Edson Utazi" userId="bcb3a38a-3ad0-4389-89a4-f1f4b25807d3" providerId="ADAL" clId="{6E6BB287-36A5-4019-B86C-EECBD7B9E602}" dt="2026-10-12T19:32:04.701" v="29217" actId="20577"/>
           <ac:spMkLst>
             <pc:docMk/>
             <pc:sldMk cId="2586324638" sldId="260"/>
@@ -1730,7 +1730,7 @@
         </pc:cxnChg>
       </pc:sldChg>
       <pc:sldChg chg="modSp new mod">
-        <pc:chgData name="Edson Utazi" userId="bcb3a38a-3ad0-4389-89a4-f1f4b25807d3" providerId="ADAL" clId="{6E6BB287-36A5-4019-B86C-EECBD7B9E602}" dt="2026-10-11T17:47:14.326" v="29045" actId="1076"/>
+        <pc:chgData name="Edson Utazi" userId="bcb3a38a-3ad0-4389-89a4-f1f4b25807d3" providerId="ADAL" clId="{6E6BB287-36A5-4019-B86C-EECBD7B9E602}" dt="2026-10-11T22:47:50.162" v="29198" actId="14100"/>
         <pc:sldMkLst>
           <pc:docMk/>
           <pc:sldMk cId="1332933936" sldId="322"/>
@@ -1744,7 +1744,7 @@
           </ac:spMkLst>
         </pc:spChg>
         <pc:spChg chg="mod">
-          <ac:chgData name="Edson Utazi" userId="bcb3a38a-3ad0-4389-89a4-f1f4b25807d3" providerId="ADAL" clId="{6E6BB287-36A5-4019-B86C-EECBD7B9E602}" dt="2026-10-11T17:47:14.326" v="29045" actId="1076"/>
+          <ac:chgData name="Edson Utazi" userId="bcb3a38a-3ad0-4389-89a4-f1f4b25807d3" providerId="ADAL" clId="{6E6BB287-36A5-4019-B86C-EECBD7B9E602}" dt="2026-10-11T22:47:50.162" v="29198" actId="14100"/>
           <ac:spMkLst>
             <pc:docMk/>
             <pc:sldMk cId="1332933936" sldId="322"/>
@@ -12369,8 +12369,8 @@
           </a:p>
         </p:txBody>
       </p:sp>
-      <mc:AlternateContent xmlns:mc="http://schemas.openxmlformats.org/markup-compatibility/2006">
-        <mc:Choice xmlns:a14="http://schemas.microsoft.com/office/drawing/2010/main" Requires="a14">
+      <mc:AlternateContent xmlns:mc="http://schemas.openxmlformats.org/markup-compatibility/2006" xmlns:a14="http://schemas.microsoft.com/office/drawing/2010/main">
+        <mc:Choice Requires="a14">
           <p:sp>
             <p:nvSpPr>
               <p:cNvPr id="6" name="Content Placeholder 5">
@@ -12779,7 +12779,7 @@
             </p:txBody>
           </p:sp>
         </mc:Choice>
-        <mc:Fallback>
+        <mc:Fallback xmlns="">
           <p:sp>
             <p:nvSpPr>
               <p:cNvPr id="6" name="Content Placeholder 5">
@@ -16264,8 +16264,8 @@
           <a:chExt cx="0" cy="0"/>
         </a:xfrm>
       </p:grpSpPr>
-      <mc:AlternateContent xmlns:mc="http://schemas.openxmlformats.org/markup-compatibility/2006">
-        <mc:Choice xmlns:a14="http://schemas.microsoft.com/office/drawing/2010/main" Requires="a14">
+      <mc:AlternateContent xmlns:mc="http://schemas.openxmlformats.org/markup-compatibility/2006" xmlns:a14="http://schemas.microsoft.com/office/drawing/2010/main">
+        <mc:Choice Requires="a14">
           <p:sp>
             <p:nvSpPr>
               <p:cNvPr id="3" name="Content Placeholder 2">
@@ -16560,7 +16560,7 @@
             </p:txBody>
           </p:sp>
         </mc:Choice>
-        <mc:Fallback>
+        <mc:Fallback xmlns="">
           <p:sp>
             <p:nvSpPr>
               <p:cNvPr id="3" name="Content Placeholder 2">
@@ -17577,8 +17577,8 @@
           <a:chExt cx="0" cy="0"/>
         </a:xfrm>
       </p:grpSpPr>
-      <mc:AlternateContent xmlns:mc="http://schemas.openxmlformats.org/markup-compatibility/2006">
-        <mc:Choice xmlns:a14="http://schemas.microsoft.com/office/drawing/2010/main" Requires="a14">
+      <mc:AlternateContent xmlns:mc="http://schemas.openxmlformats.org/markup-compatibility/2006" xmlns:a14="http://schemas.microsoft.com/office/drawing/2010/main">
+        <mc:Choice Requires="a14">
           <p:sp>
             <p:nvSpPr>
               <p:cNvPr id="3" name="Content Placeholder 2">
@@ -18007,7 +18007,7 @@
             </p:txBody>
           </p:sp>
         </mc:Choice>
-        <mc:Fallback>
+        <mc:Fallback xmlns="">
           <p:sp>
             <p:nvSpPr>
               <p:cNvPr id="3" name="Content Placeholder 2">
@@ -19410,7 +19410,7 @@
                             <a:rPr lang="en-GB" sz="3100" b="0" i="1" smtClean="0">
                               <a:latin typeface="Cambria Math" panose="02040503050406030204" pitchFamily="18" charset="0"/>
                             </a:rPr>
-                            <m:t>𝑦</m:t>
+                            <m:t>𝑌</m:t>
                           </m:r>
                         </m:e>
                         <m:sub>
@@ -19609,7 +19609,7 @@
                           <a:rPr lang="en-GB" sz="3100" b="0" i="1" smtClean="0">
                             <a:latin typeface="Cambria Math" panose="02040503050406030204" pitchFamily="18" charset="0"/>
                           </a:rPr>
-                          <m:t>𝑦</m:t>
+                          <m:t>𝑌</m:t>
                         </m:r>
                       </m:e>
                       <m:sub>
@@ -19860,7 +19860,7 @@
                           <a:rPr lang="en-GB" sz="3100" b="0" i="1" smtClean="0">
                             <a:latin typeface="Cambria Math" panose="02040503050406030204" pitchFamily="18" charset="0"/>
                           </a:rPr>
-                          <m:t>𝑦</m:t>
+                          <m:t>𝑌</m:t>
                         </m:r>
                       </m:e>
                       <m:sub>
@@ -24574,8 +24574,8 @@
           <a:chExt cx="0" cy="0"/>
         </a:xfrm>
       </p:grpSpPr>
-      <mc:AlternateContent xmlns:mc="http://schemas.openxmlformats.org/markup-compatibility/2006">
-        <mc:Choice xmlns:a14="http://schemas.microsoft.com/office/drawing/2010/main" Requires="a14">
+      <mc:AlternateContent xmlns:mc="http://schemas.openxmlformats.org/markup-compatibility/2006" xmlns:a14="http://schemas.microsoft.com/office/drawing/2010/main">
+        <mc:Choice Requires="a14">
           <p:sp>
             <p:nvSpPr>
               <p:cNvPr id="3" name="Content Placeholder 2">
@@ -25181,7 +25181,7 @@
             </p:txBody>
           </p:sp>
         </mc:Choice>
-        <mc:Fallback>
+        <mc:Fallback xmlns="">
           <p:sp>
             <p:nvSpPr>
               <p:cNvPr id="3" name="Content Placeholder 2">
@@ -26039,8 +26039,8 @@
           <a:chExt cx="0" cy="0"/>
         </a:xfrm>
       </p:grpSpPr>
-      <mc:AlternateContent xmlns:mc="http://schemas.openxmlformats.org/markup-compatibility/2006">
-        <mc:Choice xmlns:a14="http://schemas.microsoft.com/office/drawing/2010/main" Requires="a14">
+      <mc:AlternateContent xmlns:mc="http://schemas.openxmlformats.org/markup-compatibility/2006" xmlns:a14="http://schemas.microsoft.com/office/drawing/2010/main">
+        <mc:Choice Requires="a14">
           <p:sp>
             <p:nvSpPr>
               <p:cNvPr id="3" name="Content Placeholder 2">
@@ -26722,7 +26722,7 @@
             </p:txBody>
           </p:sp>
         </mc:Choice>
-        <mc:Fallback>
+        <mc:Fallback xmlns="">
           <p:sp>
             <p:nvSpPr>
               <p:cNvPr id="3" name="Content Placeholder 2">
@@ -27336,8 +27336,8 @@
           <a:chExt cx="0" cy="0"/>
         </a:xfrm>
       </p:grpSpPr>
-      <mc:AlternateContent xmlns:mc="http://schemas.openxmlformats.org/markup-compatibility/2006">
-        <mc:Choice xmlns:a14="http://schemas.microsoft.com/office/drawing/2010/main" Requires="a14">
+      <mc:AlternateContent xmlns:mc="http://schemas.openxmlformats.org/markup-compatibility/2006" xmlns:a14="http://schemas.microsoft.com/office/drawing/2010/main">
+        <mc:Choice Requires="a14">
           <p:sp>
             <p:nvSpPr>
               <p:cNvPr id="3" name="Content Placeholder 2">
@@ -28547,7 +28547,7 @@
             </p:txBody>
           </p:sp>
         </mc:Choice>
-        <mc:Fallback>
+        <mc:Fallback xmlns="">
           <p:sp>
             <p:nvSpPr>
               <p:cNvPr id="3" name="Content Placeholder 2">
@@ -30208,7 +30208,7 @@
         <p:spPr>
           <a:xfrm>
             <a:off x="502298" y="1354476"/>
-            <a:ext cx="9919997" cy="5001874"/>
+            <a:ext cx="11263604" cy="4663769"/>
           </a:xfrm>
         </p:spPr>
         <p:txBody>
@@ -30271,7 +30271,13 @@
             </a:r>
             <a:r>
               <a:rPr lang="en-GB" sz="2400" dirty="0"/>
-              <a:t>. Consider how you would specify the likelihood and choose an appropriate probability distribution for the outcome variable, define the model parameters and assign prior distributions to them, and combine the prior information with the observed data to obtain posterior distributions. Discuss how you would fit the model, summarise and interpret the posterior distributions, assess model adequacy, and generate predictions. Finally, explain how you might use credible intervals to quantify uncertainty in the estimated associations and how your approach would differ from a frequentist analysis.</a:t>
+              <a:t>. Consider how you would specify the likelihood and choose an appropriate probability distribution for the outcome variable, define the model parameters and assign prior distributions to them, and combine the prior information with the observed data to obtain posterior distributions. </a:t>
+            </a:r>
+          </a:p>
+          <a:p>
+            <a:r>
+              <a:rPr lang="en-GB" sz="2400" dirty="0"/>
+              <a:t>Discuss how you would fit the model, summarise and interpret the posterior distributions, assess model adequacy, and generate predictions. Finally, explain how you might use credible intervals to quantify uncertainty in the estimated associations and how your approach would differ from a frequentist analysis.</a:t>
             </a:r>
             <a:endParaRPr lang="en-GB" dirty="0"/>
           </a:p>
